--- a/Placeprep.pptx
+++ b/Placeprep.pptx
@@ -4,6 +4,9 @@
   <p:sldMasterIdLst>
     <p:sldMasterId id="2147483839" r:id="rId1"/>
   </p:sldMasterIdLst>
+  <p:notesMasterIdLst>
+    <p:notesMasterId r:id="rId15"/>
+  </p:notesMasterIdLst>
   <p:sldIdLst>
     <p:sldId id="256" r:id="rId2"/>
     <p:sldId id="257" r:id="rId3"/>
@@ -116,7 +119,362 @@
       </a:defRPr>
     </a:lvl9pPr>
   </p:defaultTextStyle>
+  <p:extLst>
+    <p:ext uri="{EFAFB233-063F-42B5-8137-9DF3F51BA10A}">
+      <p15:sldGuideLst xmlns:p15="http://schemas.microsoft.com/office/powerpoint/2012/main"/>
+    </p:ext>
+  </p:extLst>
 </p:presentation>
+</file>
+
+<file path=ppt/notesMasters/notesMaster1.xml><?xml version="1.0" encoding="utf-8"?>
+<p:notesMaster xmlns:a="http://schemas.openxmlformats.org/drawingml/2006/main" xmlns:r="http://schemas.openxmlformats.org/officeDocument/2006/relationships" xmlns:p="http://schemas.openxmlformats.org/presentationml/2006/main">
+  <p:cSld>
+    <p:bg>
+      <p:bgRef idx="1001">
+        <a:schemeClr val="bg1"/>
+      </p:bgRef>
+    </p:bg>
+    <p:spTree>
+      <p:nvGrpSpPr>
+        <p:cNvPr id="1" name=""/>
+        <p:cNvGrpSpPr/>
+        <p:nvPr/>
+      </p:nvGrpSpPr>
+      <p:grpSpPr>
+        <a:xfrm>
+          <a:off x="0" y="0"/>
+          <a:ext cx="0" cy="0"/>
+          <a:chOff x="0" y="0"/>
+          <a:chExt cx="0" cy="0"/>
+        </a:xfrm>
+      </p:grpSpPr>
+      <p:sp>
+        <p:nvSpPr>
+          <p:cNvPr id="2" name="Header Placeholder 1"/>
+          <p:cNvSpPr>
+            <a:spLocks noGrp="1"/>
+          </p:cNvSpPr>
+          <p:nvPr>
+            <p:ph type="hdr" sz="quarter"/>
+          </p:nvPr>
+        </p:nvSpPr>
+        <p:spPr>
+          <a:xfrm>
+            <a:off x="0" y="0"/>
+            <a:ext cx="2971800" cy="458788"/>
+          </a:xfrm>
+          <a:prstGeom prst="rect">
+            <a:avLst/>
+          </a:prstGeom>
+        </p:spPr>
+        <p:txBody>
+          <a:bodyPr vert="horz" lIns="91440" tIns="45720" rIns="91440" bIns="45720" rtlCol="0"/>
+          <a:lstStyle>
+            <a:lvl1pPr algn="l">
+              <a:defRPr sz="1200"/>
+            </a:lvl1pPr>
+          </a:lstStyle>
+          <a:p>
+            <a:endParaRPr lang="en-IN"/>
+          </a:p>
+        </p:txBody>
+      </p:sp>
+      <p:sp>
+        <p:nvSpPr>
+          <p:cNvPr id="3" name="Date Placeholder 2"/>
+          <p:cNvSpPr>
+            <a:spLocks noGrp="1"/>
+          </p:cNvSpPr>
+          <p:nvPr>
+            <p:ph type="dt" idx="1"/>
+          </p:nvPr>
+        </p:nvSpPr>
+        <p:spPr>
+          <a:xfrm>
+            <a:off x="3884613" y="0"/>
+            <a:ext cx="2971800" cy="458788"/>
+          </a:xfrm>
+          <a:prstGeom prst="rect">
+            <a:avLst/>
+          </a:prstGeom>
+        </p:spPr>
+        <p:txBody>
+          <a:bodyPr vert="horz" lIns="91440" tIns="45720" rIns="91440" bIns="45720" rtlCol="0"/>
+          <a:lstStyle>
+            <a:lvl1pPr algn="r">
+              <a:defRPr sz="1200"/>
+            </a:lvl1pPr>
+          </a:lstStyle>
+          <a:p>
+            <a:fld id="{6C563AE3-9CB6-4AE6-9A18-E615F1B8827E}" type="datetimeFigureOut">
+              <a:rPr lang="en-IN" smtClean="0"/>
+              <a:t>29-10-2025</a:t>
+            </a:fld>
+            <a:endParaRPr lang="en-IN"/>
+          </a:p>
+        </p:txBody>
+      </p:sp>
+      <p:sp>
+        <p:nvSpPr>
+          <p:cNvPr id="4" name="Slide Image Placeholder 3"/>
+          <p:cNvSpPr>
+            <a:spLocks noGrp="1" noRot="1" noChangeAspect="1"/>
+          </p:cNvSpPr>
+          <p:nvPr>
+            <p:ph type="sldImg" idx="2"/>
+          </p:nvPr>
+        </p:nvSpPr>
+        <p:spPr>
+          <a:xfrm>
+            <a:off x="685800" y="1143000"/>
+            <a:ext cx="5486400" cy="3086100"/>
+          </a:xfrm>
+          <a:prstGeom prst="rect">
+            <a:avLst/>
+          </a:prstGeom>
+          <a:noFill/>
+          <a:ln w="12700">
+            <a:solidFill>
+              <a:prstClr val="black"/>
+            </a:solidFill>
+          </a:ln>
+        </p:spPr>
+        <p:txBody>
+          <a:bodyPr vert="horz" lIns="91440" tIns="45720" rIns="91440" bIns="45720" rtlCol="0" anchor="ctr"/>
+          <a:lstStyle/>
+          <a:p>
+            <a:endParaRPr lang="en-IN"/>
+          </a:p>
+        </p:txBody>
+      </p:sp>
+      <p:sp>
+        <p:nvSpPr>
+          <p:cNvPr id="5" name="Notes Placeholder 4"/>
+          <p:cNvSpPr>
+            <a:spLocks noGrp="1"/>
+          </p:cNvSpPr>
+          <p:nvPr>
+            <p:ph type="body" sz="quarter" idx="3"/>
+          </p:nvPr>
+        </p:nvSpPr>
+        <p:spPr>
+          <a:xfrm>
+            <a:off x="685800" y="4400550"/>
+            <a:ext cx="5486400" cy="3600450"/>
+          </a:xfrm>
+          <a:prstGeom prst="rect">
+            <a:avLst/>
+          </a:prstGeom>
+        </p:spPr>
+        <p:txBody>
+          <a:bodyPr vert="horz" lIns="91440" tIns="45720" rIns="91440" bIns="45720" rtlCol="0"/>
+          <a:lstStyle/>
+          <a:p>
+            <a:pPr lvl="0"/>
+            <a:r>
+              <a:rPr lang="en-US"/>
+              <a:t>Click to edit Master text styles</a:t>
+            </a:r>
+          </a:p>
+          <a:p>
+            <a:pPr lvl="1"/>
+            <a:r>
+              <a:rPr lang="en-US"/>
+              <a:t>Second level</a:t>
+            </a:r>
+          </a:p>
+          <a:p>
+            <a:pPr lvl="2"/>
+            <a:r>
+              <a:rPr lang="en-US"/>
+              <a:t>Third level</a:t>
+            </a:r>
+          </a:p>
+          <a:p>
+            <a:pPr lvl="3"/>
+            <a:r>
+              <a:rPr lang="en-US"/>
+              <a:t>Fourth level</a:t>
+            </a:r>
+          </a:p>
+          <a:p>
+            <a:pPr lvl="4"/>
+            <a:r>
+              <a:rPr lang="en-US"/>
+              <a:t>Fifth level</a:t>
+            </a:r>
+            <a:endParaRPr lang="en-IN"/>
+          </a:p>
+        </p:txBody>
+      </p:sp>
+      <p:sp>
+        <p:nvSpPr>
+          <p:cNvPr id="6" name="Footer Placeholder 5"/>
+          <p:cNvSpPr>
+            <a:spLocks noGrp="1"/>
+          </p:cNvSpPr>
+          <p:nvPr>
+            <p:ph type="ftr" sz="quarter" idx="4"/>
+          </p:nvPr>
+        </p:nvSpPr>
+        <p:spPr>
+          <a:xfrm>
+            <a:off x="0" y="8685213"/>
+            <a:ext cx="2971800" cy="458787"/>
+          </a:xfrm>
+          <a:prstGeom prst="rect">
+            <a:avLst/>
+          </a:prstGeom>
+        </p:spPr>
+        <p:txBody>
+          <a:bodyPr vert="horz" lIns="91440" tIns="45720" rIns="91440" bIns="45720" rtlCol="0" anchor="b"/>
+          <a:lstStyle>
+            <a:lvl1pPr algn="l">
+              <a:defRPr sz="1200"/>
+            </a:lvl1pPr>
+          </a:lstStyle>
+          <a:p>
+            <a:endParaRPr lang="en-IN"/>
+          </a:p>
+        </p:txBody>
+      </p:sp>
+      <p:sp>
+        <p:nvSpPr>
+          <p:cNvPr id="7" name="Slide Number Placeholder 6"/>
+          <p:cNvSpPr>
+            <a:spLocks noGrp="1"/>
+          </p:cNvSpPr>
+          <p:nvPr>
+            <p:ph type="sldNum" sz="quarter" idx="5"/>
+          </p:nvPr>
+        </p:nvSpPr>
+        <p:spPr>
+          <a:xfrm>
+            <a:off x="3884613" y="8685213"/>
+            <a:ext cx="2971800" cy="458787"/>
+          </a:xfrm>
+          <a:prstGeom prst="rect">
+            <a:avLst/>
+          </a:prstGeom>
+        </p:spPr>
+        <p:txBody>
+          <a:bodyPr vert="horz" lIns="91440" tIns="45720" rIns="91440" bIns="45720" rtlCol="0" anchor="b"/>
+          <a:lstStyle>
+            <a:lvl1pPr algn="r">
+              <a:defRPr sz="1200"/>
+            </a:lvl1pPr>
+          </a:lstStyle>
+          <a:p>
+            <a:fld id="{25461004-5BFB-4DC3-BCD6-CABAD99273C4}" type="slidenum">
+              <a:rPr lang="en-IN" smtClean="0"/>
+              <a:t>‹#›</a:t>
+            </a:fld>
+            <a:endParaRPr lang="en-IN"/>
+          </a:p>
+        </p:txBody>
+      </p:sp>
+    </p:spTree>
+    <p:extLst>
+      <p:ext uri="{BB962C8B-B14F-4D97-AF65-F5344CB8AC3E}">
+        <p14:creationId xmlns:p14="http://schemas.microsoft.com/office/powerpoint/2010/main" val="1353153005"/>
+      </p:ext>
+    </p:extLst>
+  </p:cSld>
+  <p:clrMap bg1="lt1" tx1="dk1" bg2="lt2" tx2="dk2" accent1="accent1" accent2="accent2" accent3="accent3" accent4="accent4" accent5="accent5" accent6="accent6" hlink="hlink" folHlink="folHlink"/>
+  <p:notesStyle>
+    <a:lvl1pPr marL="0" algn="l" defTabSz="914400" rtl="0" eaLnBrk="1" latinLnBrk="0" hangingPunct="1">
+      <a:defRPr sz="1200" kern="1200">
+        <a:solidFill>
+          <a:schemeClr val="tx1"/>
+        </a:solidFill>
+        <a:latin typeface="+mn-lt"/>
+        <a:ea typeface="+mn-ea"/>
+        <a:cs typeface="+mn-cs"/>
+      </a:defRPr>
+    </a:lvl1pPr>
+    <a:lvl2pPr marL="457200" algn="l" defTabSz="914400" rtl="0" eaLnBrk="1" latinLnBrk="0" hangingPunct="1">
+      <a:defRPr sz="1200" kern="1200">
+        <a:solidFill>
+          <a:schemeClr val="tx1"/>
+        </a:solidFill>
+        <a:latin typeface="+mn-lt"/>
+        <a:ea typeface="+mn-ea"/>
+        <a:cs typeface="+mn-cs"/>
+      </a:defRPr>
+    </a:lvl2pPr>
+    <a:lvl3pPr marL="914400" algn="l" defTabSz="914400" rtl="0" eaLnBrk="1" latinLnBrk="0" hangingPunct="1">
+      <a:defRPr sz="1200" kern="1200">
+        <a:solidFill>
+          <a:schemeClr val="tx1"/>
+        </a:solidFill>
+        <a:latin typeface="+mn-lt"/>
+        <a:ea typeface="+mn-ea"/>
+        <a:cs typeface="+mn-cs"/>
+      </a:defRPr>
+    </a:lvl3pPr>
+    <a:lvl4pPr marL="1371600" algn="l" defTabSz="914400" rtl="0" eaLnBrk="1" latinLnBrk="0" hangingPunct="1">
+      <a:defRPr sz="1200" kern="1200">
+        <a:solidFill>
+          <a:schemeClr val="tx1"/>
+        </a:solidFill>
+        <a:latin typeface="+mn-lt"/>
+        <a:ea typeface="+mn-ea"/>
+        <a:cs typeface="+mn-cs"/>
+      </a:defRPr>
+    </a:lvl4pPr>
+    <a:lvl5pPr marL="1828800" algn="l" defTabSz="914400" rtl="0" eaLnBrk="1" latinLnBrk="0" hangingPunct="1">
+      <a:defRPr sz="1200" kern="1200">
+        <a:solidFill>
+          <a:schemeClr val="tx1"/>
+        </a:solidFill>
+        <a:latin typeface="+mn-lt"/>
+        <a:ea typeface="+mn-ea"/>
+        <a:cs typeface="+mn-cs"/>
+      </a:defRPr>
+    </a:lvl5pPr>
+    <a:lvl6pPr marL="2286000" algn="l" defTabSz="914400" rtl="0" eaLnBrk="1" latinLnBrk="0" hangingPunct="1">
+      <a:defRPr sz="1200" kern="1200">
+        <a:solidFill>
+          <a:schemeClr val="tx1"/>
+        </a:solidFill>
+        <a:latin typeface="+mn-lt"/>
+        <a:ea typeface="+mn-ea"/>
+        <a:cs typeface="+mn-cs"/>
+      </a:defRPr>
+    </a:lvl6pPr>
+    <a:lvl7pPr marL="2743200" algn="l" defTabSz="914400" rtl="0" eaLnBrk="1" latinLnBrk="0" hangingPunct="1">
+      <a:defRPr sz="1200" kern="1200">
+        <a:solidFill>
+          <a:schemeClr val="tx1"/>
+        </a:solidFill>
+        <a:latin typeface="+mn-lt"/>
+        <a:ea typeface="+mn-ea"/>
+        <a:cs typeface="+mn-cs"/>
+      </a:defRPr>
+    </a:lvl7pPr>
+    <a:lvl8pPr marL="3200400" algn="l" defTabSz="914400" rtl="0" eaLnBrk="1" latinLnBrk="0" hangingPunct="1">
+      <a:defRPr sz="1200" kern="1200">
+        <a:solidFill>
+          <a:schemeClr val="tx1"/>
+        </a:solidFill>
+        <a:latin typeface="+mn-lt"/>
+        <a:ea typeface="+mn-ea"/>
+        <a:cs typeface="+mn-cs"/>
+      </a:defRPr>
+    </a:lvl8pPr>
+    <a:lvl9pPr marL="3657600" algn="l" defTabSz="914400" rtl="0" eaLnBrk="1" latinLnBrk="0" hangingPunct="1">
+      <a:defRPr sz="1200" kern="1200">
+        <a:solidFill>
+          <a:schemeClr val="tx1"/>
+        </a:solidFill>
+        <a:latin typeface="+mn-lt"/>
+        <a:ea typeface="+mn-ea"/>
+        <a:cs typeface="+mn-cs"/>
+      </a:defRPr>
+    </a:lvl9pPr>
+  </p:notesStyle>
+</p:notesMaster>
 </file>
 
 <file path=ppt/slideLayouts/slideLayout1.xml><?xml version="1.0" encoding="utf-8"?>
@@ -173,13 +531,13 @@
             <a:spLocks noGrp="1"/>
           </p:cNvSpPr>
           <p:nvPr>
-            <p:ph type="ctrTitle"/>
-          </p:nvPr>
-        </p:nvSpPr>
-        <p:spPr>
-          <a:xfrm>
-            <a:off x="1751012" y="1300785"/>
-            <a:ext cx="8689976" cy="2509213"/>
+            <p:ph type="ctrTitle" hasCustomPrompt="1"/>
+          </p:nvPr>
+        </p:nvSpPr>
+        <p:spPr>
+          <a:xfrm>
+            <a:off x="1848667" y="265421"/>
+            <a:ext cx="8227489" cy="452761"/>
           </a:xfrm>
         </p:spPr>
         <p:txBody>
@@ -188,15 +546,14 @@
           </a:bodyPr>
           <a:lstStyle>
             <a:lvl1pPr algn="ctr">
-              <a:defRPr sz="4800"/>
+              <a:defRPr sz="2400"/>
             </a:lvl1pPr>
           </a:lstStyle>
           <a:p>
             <a:r>
-              <a:rPr lang="en-US"/>
-              <a:t>Click to edit Master title style</a:t>
-            </a:r>
-            <a:endParaRPr lang="en-US" dirty="0"/>
+              <a:rPr lang="en-US" dirty="0"/>
+              <a:t>G.NARAYANAMMA INSTITUTE OF TECHNOLOGY AND SCIENCE</a:t>
+            </a:r>
           </a:p>
         </p:txBody>
       </p:sp>
@@ -288,9 +645,9 @@
           <a:bodyPr/>
           <a:lstStyle/>
           <a:p>
-            <a:fld id="{93371FC0-CD28-423C-B5FD-7D071078C16C}" type="datetimeFigureOut">
+            <a:fld id="{4F664853-7847-4871-87DF-530C4BB9EAAD}" type="datetime1">
               <a:rPr lang="en-IN" smtClean="0"/>
-              <a:t>09-10-2025</a:t>
+              <a:t>29-10-2025</a:t>
             </a:fld>
             <a:endParaRPr lang="en-IN"/>
           </a:p>
@@ -311,7 +668,10 @@
           <a:bodyPr/>
           <a:lstStyle/>
           <a:p>
-            <a:endParaRPr lang="en-IN"/>
+            <a:r>
+              <a:rPr lang="en-IN"/>
+              <a:t>III CSE-C FSD project</a:t>
+            </a:r>
           </a:p>
         </p:txBody>
       </p:sp>
@@ -603,9 +963,9 @@
           <a:bodyPr/>
           <a:lstStyle/>
           <a:p>
-            <a:fld id="{93371FC0-CD28-423C-B5FD-7D071078C16C}" type="datetimeFigureOut">
+            <a:fld id="{C6318DB2-1B86-423B-A5E4-0D120EBBCE47}" type="datetime1">
               <a:rPr lang="en-IN" smtClean="0"/>
-              <a:t>09-10-2025</a:t>
+              <a:t>29-10-2025</a:t>
             </a:fld>
             <a:endParaRPr lang="en-IN"/>
           </a:p>
@@ -626,7 +986,10 @@
           <a:bodyPr/>
           <a:lstStyle/>
           <a:p>
-            <a:endParaRPr lang="en-IN"/>
+            <a:r>
+              <a:rPr lang="en-IN"/>
+              <a:t>III CSE-C FSD project</a:t>
+            </a:r>
           </a:p>
         </p:txBody>
       </p:sp>
@@ -825,9 +1188,9 @@
           <a:bodyPr/>
           <a:lstStyle/>
           <a:p>
-            <a:fld id="{93371FC0-CD28-423C-B5FD-7D071078C16C}" type="datetimeFigureOut">
+            <a:fld id="{A8FFF349-DF20-48EC-A9BC-B5B78B0E8C7A}" type="datetime1">
               <a:rPr lang="en-IN" smtClean="0"/>
-              <a:t>09-10-2025</a:t>
+              <a:t>29-10-2025</a:t>
             </a:fld>
             <a:endParaRPr lang="en-IN"/>
           </a:p>
@@ -848,7 +1211,10 @@
           <a:bodyPr/>
           <a:lstStyle/>
           <a:p>
-            <a:endParaRPr lang="en-IN"/>
+            <a:r>
+              <a:rPr lang="en-IN"/>
+              <a:t>III CSE-C FSD project</a:t>
+            </a:r>
           </a:p>
         </p:txBody>
       </p:sp>
@@ -1116,9 +1482,9 @@
           <a:bodyPr/>
           <a:lstStyle/>
           <a:p>
-            <a:fld id="{93371FC0-CD28-423C-B5FD-7D071078C16C}" type="datetimeFigureOut">
+            <a:fld id="{0251C901-BA50-4277-B90C-EFA199E63F7A}" type="datetime1">
               <a:rPr lang="en-IN" smtClean="0"/>
-              <a:t>09-10-2025</a:t>
+              <a:t>29-10-2025</a:t>
             </a:fld>
             <a:endParaRPr lang="en-IN"/>
           </a:p>
@@ -1139,7 +1505,10 @@
           <a:bodyPr/>
           <a:lstStyle/>
           <a:p>
-            <a:endParaRPr lang="en-IN"/>
+            <a:r>
+              <a:rPr lang="en-IN"/>
+              <a:t>III CSE-C FSD project</a:t>
+            </a:r>
           </a:p>
         </p:txBody>
       </p:sp>
@@ -1570,9 +1939,9 @@
           <a:bodyPr/>
           <a:lstStyle/>
           <a:p>
-            <a:fld id="{93371FC0-CD28-423C-B5FD-7D071078C16C}" type="datetimeFigureOut">
+            <a:fld id="{D601F4B2-A6D0-45C7-BA07-A83A4889707D}" type="datetime1">
               <a:rPr lang="en-IN" smtClean="0"/>
-              <a:t>09-10-2025</a:t>
+              <a:t>29-10-2025</a:t>
             </a:fld>
             <a:endParaRPr lang="en-IN"/>
           </a:p>
@@ -1593,7 +1962,10 @@
           <a:bodyPr/>
           <a:lstStyle/>
           <a:p>
-            <a:endParaRPr lang="en-IN"/>
+            <a:r>
+              <a:rPr lang="en-IN"/>
+              <a:t>III CSE-C FSD project</a:t>
+            </a:r>
           </a:p>
         </p:txBody>
       </p:sp>
@@ -2146,9 +2518,9 @@
           <a:bodyPr/>
           <a:lstStyle/>
           <a:p>
-            <a:fld id="{93371FC0-CD28-423C-B5FD-7D071078C16C}" type="datetimeFigureOut">
+            <a:fld id="{E44D1984-67AB-4993-A58F-F33AA61CE3B1}" type="datetime1">
               <a:rPr lang="en-IN" smtClean="0"/>
-              <a:t>09-10-2025</a:t>
+              <a:t>29-10-2025</a:t>
             </a:fld>
             <a:endParaRPr lang="en-IN"/>
           </a:p>
@@ -2169,7 +2541,10 @@
           <a:bodyPr/>
           <a:lstStyle/>
           <a:p>
-            <a:endParaRPr lang="en-IN"/>
+            <a:r>
+              <a:rPr lang="en-IN"/>
+              <a:t>III CSE-C FSD project</a:t>
+            </a:r>
           </a:p>
         </p:txBody>
       </p:sp>
@@ -3007,9 +3382,9 @@
           <a:bodyPr/>
           <a:lstStyle/>
           <a:p>
-            <a:fld id="{93371FC0-CD28-423C-B5FD-7D071078C16C}" type="datetimeFigureOut">
+            <a:fld id="{624B3BE9-44BD-4882-86FA-C308BE13FE6F}" type="datetime1">
               <a:rPr lang="en-IN" smtClean="0"/>
-              <a:t>09-10-2025</a:t>
+              <a:t>29-10-2025</a:t>
             </a:fld>
             <a:endParaRPr lang="en-IN"/>
           </a:p>
@@ -3030,7 +3405,10 @@
           <a:bodyPr/>
           <a:lstStyle/>
           <a:p>
-            <a:endParaRPr lang="en-IN"/>
+            <a:r>
+              <a:rPr lang="en-IN"/>
+              <a:t>III CSE-C FSD project</a:t>
+            </a:r>
           </a:p>
         </p:txBody>
       </p:sp>
@@ -3212,9 +3590,9 @@
           <a:bodyPr/>
           <a:lstStyle/>
           <a:p>
-            <a:fld id="{93371FC0-CD28-423C-B5FD-7D071078C16C}" type="datetimeFigureOut">
+            <a:fld id="{604576DE-EBFD-4DD7-B67C-3CC50E546BBD}" type="datetime1">
               <a:rPr lang="en-IN" smtClean="0"/>
-              <a:t>09-10-2025</a:t>
+              <a:t>29-10-2025</a:t>
             </a:fld>
             <a:endParaRPr lang="en-IN"/>
           </a:p>
@@ -3235,7 +3613,10 @@
           <a:bodyPr/>
           <a:lstStyle/>
           <a:p>
-            <a:endParaRPr lang="en-IN"/>
+            <a:r>
+              <a:rPr lang="en-IN"/>
+              <a:t>III CSE-C FSD project</a:t>
+            </a:r>
           </a:p>
         </p:txBody>
       </p:sp>
@@ -3426,9 +3807,9 @@
           <a:bodyPr/>
           <a:lstStyle/>
           <a:p>
-            <a:fld id="{93371FC0-CD28-423C-B5FD-7D071078C16C}" type="datetimeFigureOut">
+            <a:fld id="{12EFD6EE-9AC6-4439-A476-C460B4A08CF8}" type="datetime1">
               <a:rPr lang="en-IN" smtClean="0"/>
-              <a:t>09-10-2025</a:t>
+              <a:t>29-10-2025</a:t>
             </a:fld>
             <a:endParaRPr lang="en-IN"/>
           </a:p>
@@ -3449,7 +3830,10 @@
           <a:bodyPr/>
           <a:lstStyle/>
           <a:p>
-            <a:endParaRPr lang="en-IN"/>
+            <a:r>
+              <a:rPr lang="en-IN"/>
+              <a:t>III CSE-C FSD project</a:t>
+            </a:r>
           </a:p>
         </p:txBody>
       </p:sp>
@@ -3513,7 +3897,40 @@
             <a:spLocks noGrp="1"/>
           </p:cNvSpPr>
           <p:nvPr>
-            <p:ph type="title"/>
+            <p:ph type="title" hasCustomPrompt="1"/>
+          </p:nvPr>
+        </p:nvSpPr>
+        <p:spPr>
+          <a:xfrm>
+            <a:off x="913775" y="618517"/>
+            <a:ext cx="9295545" cy="562213"/>
+          </a:xfrm>
+        </p:spPr>
+        <p:txBody>
+          <a:bodyPr>
+            <a:normAutofit/>
+          </a:bodyPr>
+          <a:lstStyle>
+            <a:lvl1pPr>
+              <a:defRPr sz="2400"/>
+            </a:lvl1pPr>
+          </a:lstStyle>
+          <a:p>
+            <a:r>
+              <a:rPr lang="en-US" dirty="0"/>
+              <a:t>g. Narayanamma institute of technology and science</a:t>
+            </a:r>
+          </a:p>
+        </p:txBody>
+      </p:sp>
+      <p:sp>
+        <p:nvSpPr>
+          <p:cNvPr id="3" name="Content Placeholder 2"/>
+          <p:cNvSpPr>
+            <a:spLocks noGrp="1"/>
+          </p:cNvSpPr>
+          <p:nvPr>
+            <p:ph idx="1"/>
           </p:nvPr>
         </p:nvSpPr>
         <p:spPr/>
@@ -3521,22 +3938,50 @@
           <a:bodyPr/>
           <a:lstStyle/>
           <a:p>
-            <a:r>
-              <a:rPr lang="en-US"/>
-              <a:t>Click to edit Master title style</a:t>
-            </a:r>
-            <a:endParaRPr lang="en-US" dirty="0"/>
-          </a:p>
-        </p:txBody>
-      </p:sp>
-      <p:sp>
-        <p:nvSpPr>
-          <p:cNvPr id="3" name="Content Placeholder 2"/>
-          <p:cNvSpPr>
-            <a:spLocks noGrp="1"/>
-          </p:cNvSpPr>
-          <p:nvPr>
-            <p:ph idx="1"/>
+            <a:pPr lvl="0"/>
+            <a:r>
+              <a:rPr lang="en-US" dirty="0"/>
+              <a:t>Click to edit Master text styles</a:t>
+            </a:r>
+          </a:p>
+          <a:p>
+            <a:pPr lvl="1"/>
+            <a:r>
+              <a:rPr lang="en-US" dirty="0"/>
+              <a:t>Second level</a:t>
+            </a:r>
+          </a:p>
+          <a:p>
+            <a:pPr lvl="2"/>
+            <a:r>
+              <a:rPr lang="en-US" dirty="0"/>
+              <a:t>Third level</a:t>
+            </a:r>
+          </a:p>
+          <a:p>
+            <a:pPr lvl="3"/>
+            <a:r>
+              <a:rPr lang="en-US" dirty="0"/>
+              <a:t>Fourth level</a:t>
+            </a:r>
+          </a:p>
+          <a:p>
+            <a:pPr lvl="4"/>
+            <a:r>
+              <a:rPr lang="en-US" dirty="0"/>
+              <a:t>Fifth level</a:t>
+            </a:r>
+          </a:p>
+        </p:txBody>
+      </p:sp>
+      <p:sp>
+        <p:nvSpPr>
+          <p:cNvPr id="4" name="Date Placeholder 3"/>
+          <p:cNvSpPr>
+            <a:spLocks noGrp="1"/>
+          </p:cNvSpPr>
+          <p:nvPr>
+            <p:ph type="dt" sz="half" idx="10"/>
           </p:nvPr>
         </p:nvSpPr>
         <p:spPr/>
@@ -3544,61 +3989,9 @@
           <a:bodyPr/>
           <a:lstStyle/>
           <a:p>
-            <a:pPr lvl="0"/>
-            <a:r>
-              <a:rPr lang="en-US"/>
-              <a:t>Click to edit Master text styles</a:t>
-            </a:r>
-          </a:p>
-          <a:p>
-            <a:pPr lvl="1"/>
-            <a:r>
-              <a:rPr lang="en-US"/>
-              <a:t>Second level</a:t>
-            </a:r>
-          </a:p>
-          <a:p>
-            <a:pPr lvl="2"/>
-            <a:r>
-              <a:rPr lang="en-US"/>
-              <a:t>Third level</a:t>
-            </a:r>
-          </a:p>
-          <a:p>
-            <a:pPr lvl="3"/>
-            <a:r>
-              <a:rPr lang="en-US"/>
-              <a:t>Fourth level</a:t>
-            </a:r>
-          </a:p>
-          <a:p>
-            <a:pPr lvl="4"/>
-            <a:r>
-              <a:rPr lang="en-US"/>
-              <a:t>Fifth level</a:t>
-            </a:r>
-            <a:endParaRPr lang="en-US" dirty="0"/>
-          </a:p>
-        </p:txBody>
-      </p:sp>
-      <p:sp>
-        <p:nvSpPr>
-          <p:cNvPr id="4" name="Date Placeholder 3"/>
-          <p:cNvSpPr>
-            <a:spLocks noGrp="1"/>
-          </p:cNvSpPr>
-          <p:nvPr>
-            <p:ph type="dt" sz="half" idx="10"/>
-          </p:nvPr>
-        </p:nvSpPr>
-        <p:spPr/>
-        <p:txBody>
-          <a:bodyPr/>
-          <a:lstStyle/>
-          <a:p>
-            <a:fld id="{93371FC0-CD28-423C-B5FD-7D071078C16C}" type="datetimeFigureOut">
+            <a:fld id="{EA89C89E-C393-4717-84BD-4CCF72F4AFD6}" type="datetime1">
               <a:rPr lang="en-IN" smtClean="0"/>
-              <a:t>09-10-2025</a:t>
+              <a:t>29-10-2025</a:t>
             </a:fld>
             <a:endParaRPr lang="en-IN"/>
           </a:p>
@@ -3619,7 +4012,10 @@
           <a:bodyPr/>
           <a:lstStyle/>
           <a:p>
-            <a:endParaRPr lang="en-IN"/>
+            <a:r>
+              <a:rPr lang="en-IN"/>
+              <a:t>III CSE-C FSD project</a:t>
+            </a:r>
           </a:p>
         </p:txBody>
       </p:sp>
@@ -3801,9 +4197,9 @@
           <a:bodyPr/>
           <a:lstStyle/>
           <a:p>
-            <a:fld id="{93371FC0-CD28-423C-B5FD-7D071078C16C}" type="datetimeFigureOut">
+            <a:fld id="{6970B330-E0AF-4C57-A0D5-9127508870DE}" type="datetime1">
               <a:rPr lang="en-IN" smtClean="0"/>
-              <a:t>09-10-2025</a:t>
+              <a:t>29-10-2025</a:t>
             </a:fld>
             <a:endParaRPr lang="en-IN"/>
           </a:p>
@@ -3824,7 +4220,10 @@
           <a:bodyPr/>
           <a:lstStyle/>
           <a:p>
-            <a:endParaRPr lang="en-IN"/>
+            <a:r>
+              <a:rPr lang="en-IN"/>
+              <a:t>III CSE-C FSD project</a:t>
+            </a:r>
           </a:p>
         </p:txBody>
       </p:sp>
@@ -4081,9 +4480,9 @@
           <a:bodyPr/>
           <a:lstStyle/>
           <a:p>
-            <a:fld id="{93371FC0-CD28-423C-B5FD-7D071078C16C}" type="datetimeFigureOut">
+            <a:fld id="{82B66C29-2747-4125-87AB-0CC9E0CA3DB5}" type="datetime1">
               <a:rPr lang="en-IN" smtClean="0"/>
-              <a:t>09-10-2025</a:t>
+              <a:t>29-10-2025</a:t>
             </a:fld>
             <a:endParaRPr lang="en-IN"/>
           </a:p>
@@ -4104,7 +4503,10 @@
           <a:bodyPr/>
           <a:lstStyle/>
           <a:p>
-            <a:endParaRPr lang="en-IN"/>
+            <a:r>
+              <a:rPr lang="en-IN"/>
+              <a:t>III CSE-C FSD project</a:t>
+            </a:r>
           </a:p>
         </p:txBody>
       </p:sp>
@@ -4348,9 +4750,9 @@
           <a:bodyPr/>
           <a:lstStyle/>
           <a:p>
-            <a:fld id="{93371FC0-CD28-423C-B5FD-7D071078C16C}" type="datetimeFigureOut">
+            <a:fld id="{EAA8A8D0-C174-4D9C-B400-1B173CFB941C}" type="datetime1">
               <a:rPr lang="en-IN" smtClean="0"/>
-              <a:t>09-10-2025</a:t>
+              <a:t>29-10-2025</a:t>
             </a:fld>
             <a:endParaRPr lang="en-IN"/>
           </a:p>
@@ -4371,7 +4773,10 @@
           <a:bodyPr/>
           <a:lstStyle/>
           <a:p>
-            <a:endParaRPr lang="en-IN"/>
+            <a:r>
+              <a:rPr lang="en-IN"/>
+              <a:t>III CSE-C FSD project</a:t>
+            </a:r>
           </a:p>
         </p:txBody>
       </p:sp>
@@ -4763,9 +5168,9 @@
           <a:bodyPr/>
           <a:lstStyle/>
           <a:p>
-            <a:fld id="{93371FC0-CD28-423C-B5FD-7D071078C16C}" type="datetimeFigureOut">
+            <a:fld id="{7D256639-3928-4ED0-9C9A-36CDF00AD932}" type="datetime1">
               <a:rPr lang="en-IN" smtClean="0"/>
-              <a:t>09-10-2025</a:t>
+              <a:t>29-10-2025</a:t>
             </a:fld>
             <a:endParaRPr lang="en-IN"/>
           </a:p>
@@ -4786,7 +5191,10 @@
           <a:bodyPr/>
           <a:lstStyle/>
           <a:p>
-            <a:endParaRPr lang="en-IN"/>
+            <a:r>
+              <a:rPr lang="en-IN"/>
+              <a:t>III CSE-C FSD project</a:t>
+            </a:r>
           </a:p>
         </p:txBody>
       </p:sp>
@@ -4911,9 +5319,9 @@
           <a:bodyPr/>
           <a:lstStyle/>
           <a:p>
-            <a:fld id="{93371FC0-CD28-423C-B5FD-7D071078C16C}" type="datetimeFigureOut">
+            <a:fld id="{600D6580-682B-4CDF-AE19-366CA2FB0D02}" type="datetime1">
               <a:rPr lang="en-IN" smtClean="0"/>
-              <a:t>09-10-2025</a:t>
+              <a:t>29-10-2025</a:t>
             </a:fld>
             <a:endParaRPr lang="en-IN"/>
           </a:p>
@@ -4934,7 +5342,10 @@
           <a:bodyPr/>
           <a:lstStyle/>
           <a:p>
-            <a:endParaRPr lang="en-IN"/>
+            <a:r>
+              <a:rPr lang="en-IN"/>
+              <a:t>III CSE-C FSD project</a:t>
+            </a:r>
           </a:p>
         </p:txBody>
       </p:sp>
@@ -5036,9 +5447,9 @@
           <a:bodyPr/>
           <a:lstStyle/>
           <a:p>
-            <a:fld id="{93371FC0-CD28-423C-B5FD-7D071078C16C}" type="datetimeFigureOut">
+            <a:fld id="{6F92BC0A-4346-4F46-B448-EEFA15DEFC40}" type="datetime1">
               <a:rPr lang="en-IN" smtClean="0"/>
-              <a:t>09-10-2025</a:t>
+              <a:t>29-10-2025</a:t>
             </a:fld>
             <a:endParaRPr lang="en-IN"/>
           </a:p>
@@ -5059,7 +5470,10 @@
           <a:bodyPr/>
           <a:lstStyle/>
           <a:p>
-            <a:endParaRPr lang="en-IN"/>
+            <a:r>
+              <a:rPr lang="en-IN"/>
+              <a:t>III CSE-C FSD project</a:t>
+            </a:r>
           </a:p>
         </p:txBody>
       </p:sp>
@@ -5315,9 +5729,9 @@
           <a:bodyPr/>
           <a:lstStyle/>
           <a:p>
-            <a:fld id="{93371FC0-CD28-423C-B5FD-7D071078C16C}" type="datetimeFigureOut">
+            <a:fld id="{89B389F3-6A73-42F9-8A9C-35618D3E0DB5}" type="datetime1">
               <a:rPr lang="en-IN" smtClean="0"/>
-              <a:t>09-10-2025</a:t>
+              <a:t>29-10-2025</a:t>
             </a:fld>
             <a:endParaRPr lang="en-IN"/>
           </a:p>
@@ -5338,7 +5752,10 @@
           <a:bodyPr/>
           <a:lstStyle/>
           <a:p>
-            <a:endParaRPr lang="en-IN"/>
+            <a:r>
+              <a:rPr lang="en-IN"/>
+              <a:t>III CSE-C FSD project</a:t>
+            </a:r>
           </a:p>
         </p:txBody>
       </p:sp>
@@ -5630,9 +6047,9 @@
           <a:bodyPr/>
           <a:lstStyle/>
           <a:p>
-            <a:fld id="{93371FC0-CD28-423C-B5FD-7D071078C16C}" type="datetimeFigureOut">
+            <a:fld id="{414AFBC3-03A8-4D49-8CEB-39AB974E5C41}" type="datetime1">
               <a:rPr lang="en-IN" smtClean="0"/>
-              <a:t>09-10-2025</a:t>
+              <a:t>29-10-2025</a:t>
             </a:fld>
             <a:endParaRPr lang="en-IN"/>
           </a:p>
@@ -5653,7 +6070,10 @@
           <a:bodyPr/>
           <a:lstStyle/>
           <a:p>
-            <a:endParaRPr lang="en-IN"/>
+            <a:r>
+              <a:rPr lang="en-IN"/>
+              <a:t>III CSE-C FSD project</a:t>
+            </a:r>
           </a:p>
         </p:txBody>
       </p:sp>
@@ -5883,9 +6303,9 @@
             </a:lvl1pPr>
           </a:lstStyle>
           <a:p>
-            <a:fld id="{93371FC0-CD28-423C-B5FD-7D071078C16C}" type="datetimeFigureOut">
+            <a:fld id="{CAFA6981-20E3-4256-84A9-182E1E1BEA10}" type="datetime1">
               <a:rPr lang="en-IN" smtClean="0"/>
-              <a:t>09-10-2025</a:t>
+              <a:t>29-10-2025</a:t>
             </a:fld>
             <a:endParaRPr lang="en-IN"/>
           </a:p>
@@ -5922,7 +6342,10 @@
             </a:lvl1pPr>
           </a:lstStyle>
           <a:p>
-            <a:endParaRPr lang="en-IN"/>
+            <a:r>
+              <a:rPr lang="en-IN"/>
+              <a:t>III CSE-C FSD project</a:t>
+            </a:r>
           </a:p>
         </p:txBody>
       </p:sp>
@@ -5993,6 +6416,7 @@
     <p:sldLayoutId id="2147483856" r:id="rId17"/>
     <p:sldLayoutId id="2147483857" r:id="rId18"/>
   </p:sldLayoutIdLst>
+  <p:hf sldNum="0" hdr="0" dt="0"/>
   <p:txStyles>
     <p:titleStyle>
       <a:lvl1pPr algn="ctr" defTabSz="914400" rtl="0" eaLnBrk="1" latinLnBrk="0" hangingPunct="1">
@@ -6348,16 +6772,18 @@
         </p:nvSpPr>
         <p:spPr>
           <a:xfrm>
-            <a:off x="1068729" y="949123"/>
-            <a:ext cx="8689976" cy="1946474"/>
-          </a:xfrm>
-        </p:spPr>
-        <p:txBody>
-          <a:bodyPr/>
-          <a:lstStyle/>
-          <a:p>
-            <a:r>
-              <a:rPr lang="en-IN" dirty="0">
+            <a:off x="1068729" y="2123021"/>
+            <a:ext cx="8689976" cy="772575"/>
+          </a:xfrm>
+        </p:spPr>
+        <p:txBody>
+          <a:bodyPr>
+            <a:normAutofit/>
+          </a:bodyPr>
+          <a:lstStyle/>
+          <a:p>
+            <a:r>
+              <a:rPr lang="en-IN" sz="2800" dirty="0">
                 <a:latin typeface="Arial Rounded MT Bold" panose="020F0704030504030204" pitchFamily="34" charset="0"/>
               </a:rPr>
               <a:t>Placements Portal using React.js</a:t>
@@ -6383,7 +6809,7 @@
         </p:nvSpPr>
         <p:spPr>
           <a:xfrm>
-            <a:off x="6389226" y="3185454"/>
+            <a:off x="6200690" y="3263204"/>
             <a:ext cx="4861366" cy="1946474"/>
           </a:xfrm>
         </p:spPr>
@@ -6434,6 +6860,74 @@
                 </a:solidFill>
               </a:rPr>
               <a:t>M. Srinidhi (24255A0517)</a:t>
+            </a:r>
+          </a:p>
+        </p:txBody>
+      </p:sp>
+      <p:sp>
+        <p:nvSpPr>
+          <p:cNvPr id="4" name="Footer Placeholder 3">
+            <a:extLst>
+              <a:ext uri="{FF2B5EF4-FFF2-40B4-BE49-F238E27FC236}">
+                <a16:creationId xmlns:a16="http://schemas.microsoft.com/office/drawing/2014/main" id="{2C5E746A-B1E6-651D-5CE1-0770EAFD00B3}"/>
+              </a:ext>
+            </a:extLst>
+          </p:cNvPr>
+          <p:cNvSpPr>
+            <a:spLocks noGrp="1"/>
+          </p:cNvSpPr>
+          <p:nvPr>
+            <p:ph type="ftr" sz="quarter" idx="11"/>
+          </p:nvPr>
+        </p:nvSpPr>
+        <p:spPr>
+          <a:xfrm>
+            <a:off x="178483" y="6194360"/>
+            <a:ext cx="6672887" cy="365125"/>
+          </a:xfrm>
+        </p:spPr>
+        <p:txBody>
+          <a:bodyPr/>
+          <a:lstStyle/>
+          <a:p>
+            <a:r>
+              <a:rPr lang="en-IN" sz="2000" dirty="0"/>
+              <a:t>III CSE-C FSD Project</a:t>
+            </a:r>
+          </a:p>
+        </p:txBody>
+      </p:sp>
+      <p:sp>
+        <p:nvSpPr>
+          <p:cNvPr id="6" name="TextBox 5">
+            <a:extLst>
+              <a:ext uri="{FF2B5EF4-FFF2-40B4-BE49-F238E27FC236}">
+                <a16:creationId xmlns:a16="http://schemas.microsoft.com/office/drawing/2014/main" id="{BBE7DBE2-2C3B-D21A-5A8D-36EAE8120F93}"/>
+              </a:ext>
+            </a:extLst>
+          </p:cNvPr>
+          <p:cNvSpPr txBox="1"/>
+          <p:nvPr/>
+        </p:nvSpPr>
+        <p:spPr>
+          <a:xfrm>
+            <a:off x="1498861" y="320511"/>
+            <a:ext cx="8380429" cy="461665"/>
+          </a:xfrm>
+          <a:prstGeom prst="rect">
+            <a:avLst/>
+          </a:prstGeom>
+          <a:noFill/>
+        </p:spPr>
+        <p:txBody>
+          <a:bodyPr wrap="square" rtlCol="0">
+            <a:spAutoFit/>
+          </a:bodyPr>
+          <a:lstStyle/>
+          <a:p>
+            <a:r>
+              <a:rPr lang="en-IN" sz="2400" dirty="0"/>
+              <a:t>G. Narayanamma Institute of Technology and Science (For Women)</a:t>
             </a:r>
           </a:p>
         </p:txBody>
@@ -6486,7 +6980,7 @@
         </p:nvSpPr>
         <p:spPr>
           <a:xfrm>
-            <a:off x="913774" y="375450"/>
+            <a:off x="913774" y="591605"/>
             <a:ext cx="10364451" cy="666272"/>
           </a:xfrm>
         </p:spPr>
@@ -6527,8 +7021,8 @@
         </p:blipFill>
         <p:spPr>
           <a:xfrm>
-            <a:off x="1453298" y="1322050"/>
-            <a:ext cx="9285402" cy="4724400"/>
+            <a:off x="1632407" y="1195282"/>
+            <a:ext cx="9174926" cy="4668190"/>
           </a:xfrm>
           <a:prstGeom prst="rect">
             <a:avLst/>
@@ -6549,7 +7043,7 @@
         </p:nvSpPr>
         <p:spPr>
           <a:xfrm>
-            <a:off x="4166072" y="6046450"/>
+            <a:off x="4260340" y="5897063"/>
             <a:ext cx="6094428" cy="369332"/>
           </a:xfrm>
           <a:prstGeom prst="rect">
@@ -6568,7 +7062,75 @@
                 <a:latin typeface="Times New Roman" panose="02020603050405020304" pitchFamily="18" charset="0"/>
                 <a:cs typeface="Times New Roman" panose="02020603050405020304" pitchFamily="18" charset="0"/>
               </a:rPr>
-              <a:t>Fig 1: User Interface (Resources Page) </a:t>
+              <a:t>Fig 6: User Interface (Resources Page) </a:t>
+            </a:r>
+          </a:p>
+        </p:txBody>
+      </p:sp>
+      <p:sp>
+        <p:nvSpPr>
+          <p:cNvPr id="3" name="Footer Placeholder 2">
+            <a:extLst>
+              <a:ext uri="{FF2B5EF4-FFF2-40B4-BE49-F238E27FC236}">
+                <a16:creationId xmlns:a16="http://schemas.microsoft.com/office/drawing/2014/main" id="{37255039-C99A-0925-A022-5657A55FD3D3}"/>
+              </a:ext>
+            </a:extLst>
+          </p:cNvPr>
+          <p:cNvSpPr>
+            <a:spLocks noGrp="1"/>
+          </p:cNvSpPr>
+          <p:nvPr>
+            <p:ph type="ftr" sz="quarter" idx="11"/>
+          </p:nvPr>
+        </p:nvSpPr>
+        <p:spPr>
+          <a:xfrm>
+            <a:off x="490270" y="6299987"/>
+            <a:ext cx="6672887" cy="365125"/>
+          </a:xfrm>
+        </p:spPr>
+        <p:txBody>
+          <a:bodyPr/>
+          <a:lstStyle/>
+          <a:p>
+            <a:r>
+              <a:rPr lang="en-IN" sz="2000" dirty="0"/>
+              <a:t>III CSE-C FSD Project</a:t>
+            </a:r>
+          </a:p>
+        </p:txBody>
+      </p:sp>
+      <p:sp>
+        <p:nvSpPr>
+          <p:cNvPr id="4" name="TextBox 3">
+            <a:extLst>
+              <a:ext uri="{FF2B5EF4-FFF2-40B4-BE49-F238E27FC236}">
+                <a16:creationId xmlns:a16="http://schemas.microsoft.com/office/drawing/2014/main" id="{D94A7C30-FBAD-5F2D-8E06-B668E1DBB947}"/>
+              </a:ext>
+            </a:extLst>
+          </p:cNvPr>
+          <p:cNvSpPr txBox="1"/>
+          <p:nvPr/>
+        </p:nvSpPr>
+        <p:spPr>
+          <a:xfrm>
+            <a:off x="1637906" y="147757"/>
+            <a:ext cx="8411068" cy="461665"/>
+          </a:xfrm>
+          <a:prstGeom prst="rect">
+            <a:avLst/>
+          </a:prstGeom>
+          <a:noFill/>
+        </p:spPr>
+        <p:txBody>
+          <a:bodyPr wrap="square">
+            <a:spAutoFit/>
+          </a:bodyPr>
+          <a:lstStyle/>
+          <a:p>
+            <a:r>
+              <a:rPr lang="en-IN" sz="2400" dirty="0"/>
+              <a:t>G. Narayanamma Institute of Technology and Science (For Women)</a:t>
             </a:r>
           </a:p>
         </p:txBody>
@@ -6621,7 +7183,7 @@
         </p:nvSpPr>
         <p:spPr>
           <a:xfrm>
-            <a:off x="812175" y="303557"/>
+            <a:off x="812175" y="699545"/>
             <a:ext cx="10364451" cy="783563"/>
           </a:xfrm>
         </p:spPr>
@@ -6662,7 +7224,7 @@
         </p:blipFill>
         <p:spPr>
           <a:xfrm>
-            <a:off x="1524000" y="1245224"/>
+            <a:off x="1448585" y="1418427"/>
             <a:ext cx="8940800" cy="4439921"/>
           </a:xfrm>
           <a:prstGeom prst="rect">
@@ -6684,7 +7246,7 @@
         </p:nvSpPr>
         <p:spPr>
           <a:xfrm>
-            <a:off x="3362960" y="5843250"/>
+            <a:off x="3546940" y="5881275"/>
             <a:ext cx="6917860" cy="369332"/>
           </a:xfrm>
           <a:prstGeom prst="rect">
@@ -6703,7 +7265,7 @@
                 <a:latin typeface="Times New Roman" panose="02020603050405020304" pitchFamily="18" charset="0"/>
                 <a:cs typeface="Times New Roman" panose="02020603050405020304" pitchFamily="18" charset="0"/>
               </a:rPr>
-              <a:t>Fig 1: User Interface (N</a:t>
+              <a:t>Fig 7: User Interface (N</a:t>
             </a:r>
             <a:r>
               <a:rPr lang="en-IN" dirty="0"/>
@@ -6715,6 +7277,74 @@
                 <a:cs typeface="Times New Roman" panose="02020603050405020304" pitchFamily="18" charset="0"/>
               </a:rPr>
               <a:t>) </a:t>
+            </a:r>
+          </a:p>
+        </p:txBody>
+      </p:sp>
+      <p:sp>
+        <p:nvSpPr>
+          <p:cNvPr id="3" name="Footer Placeholder 2">
+            <a:extLst>
+              <a:ext uri="{FF2B5EF4-FFF2-40B4-BE49-F238E27FC236}">
+                <a16:creationId xmlns:a16="http://schemas.microsoft.com/office/drawing/2014/main" id="{673D5DF7-62EE-8B8B-591F-6C785F260AEF}"/>
+              </a:ext>
+            </a:extLst>
+          </p:cNvPr>
+          <p:cNvSpPr>
+            <a:spLocks noGrp="1"/>
+          </p:cNvSpPr>
+          <p:nvPr>
+            <p:ph type="ftr" sz="quarter" idx="11"/>
+          </p:nvPr>
+        </p:nvSpPr>
+        <p:spPr>
+          <a:xfrm>
+            <a:off x="367019" y="6212582"/>
+            <a:ext cx="6672887" cy="365125"/>
+          </a:xfrm>
+        </p:spPr>
+        <p:txBody>
+          <a:bodyPr/>
+          <a:lstStyle/>
+          <a:p>
+            <a:r>
+              <a:rPr lang="en-IN" sz="2000" dirty="0"/>
+              <a:t>III CSE-C FSD Project</a:t>
+            </a:r>
+          </a:p>
+        </p:txBody>
+      </p:sp>
+      <p:sp>
+        <p:nvSpPr>
+          <p:cNvPr id="4" name="TextBox 3">
+            <a:extLst>
+              <a:ext uri="{FF2B5EF4-FFF2-40B4-BE49-F238E27FC236}">
+                <a16:creationId xmlns:a16="http://schemas.microsoft.com/office/drawing/2014/main" id="{6A69039A-6E25-A6E3-3DF2-2F4EE05834F8}"/>
+              </a:ext>
+            </a:extLst>
+          </p:cNvPr>
+          <p:cNvSpPr txBox="1"/>
+          <p:nvPr/>
+        </p:nvSpPr>
+        <p:spPr>
+          <a:xfrm>
+            <a:off x="1637906" y="147757"/>
+            <a:ext cx="8411068" cy="461665"/>
+          </a:xfrm>
+          <a:prstGeom prst="rect">
+            <a:avLst/>
+          </a:prstGeom>
+          <a:noFill/>
+        </p:spPr>
+        <p:txBody>
+          <a:bodyPr wrap="square">
+            <a:spAutoFit/>
+          </a:bodyPr>
+          <a:lstStyle/>
+          <a:p>
+            <a:r>
+              <a:rPr lang="en-IN" sz="2400" dirty="0"/>
+              <a:t>G. Narayanamma Institute of Technology and Science (For Women)</a:t>
             </a:r>
           </a:p>
         </p:txBody>
@@ -6767,7 +7397,7 @@
         </p:nvSpPr>
         <p:spPr>
           <a:xfrm>
-            <a:off x="913775" y="618517"/>
+            <a:off x="913774" y="780890"/>
             <a:ext cx="10364451" cy="824203"/>
           </a:xfrm>
         </p:spPr>
@@ -6804,8 +7434,8 @@
         </p:nvSpPr>
         <p:spPr>
           <a:xfrm>
-            <a:off x="1106815" y="1605093"/>
-            <a:ext cx="10364452" cy="4907467"/>
+            <a:off x="1010294" y="1605093"/>
+            <a:ext cx="10171410" cy="4472017"/>
           </a:xfrm>
         </p:spPr>
         <p:txBody>
@@ -6815,20 +7445,20 @@
           <a:lstStyle/>
           <a:p>
             <a:r>
-              <a:rPr lang="en-US" b="1" cap="none" dirty="0">
+              <a:rPr lang="en-US" sz="1800" b="1" cap="none" dirty="0">
                 <a:latin typeface="Times New Roman" panose="02020603050405020304" pitchFamily="18" charset="0"/>
                 <a:cs typeface="Times New Roman" panose="02020603050405020304" pitchFamily="18" charset="0"/>
               </a:rPr>
               <a:t>Structured react project using components:</a:t>
             </a:r>
             <a:br>
-              <a:rPr lang="en-US" cap="none" dirty="0">
+              <a:rPr lang="en-US" sz="1800" cap="none" dirty="0">
                 <a:latin typeface="Times New Roman" panose="02020603050405020304" pitchFamily="18" charset="0"/>
                 <a:cs typeface="Times New Roman" panose="02020603050405020304" pitchFamily="18" charset="0"/>
               </a:rPr>
             </a:br>
             <a:r>
-              <a:rPr lang="en-US" cap="none" dirty="0">
+              <a:rPr lang="en-US" sz="1800" cap="none" dirty="0">
                 <a:latin typeface="Times New Roman" panose="02020603050405020304" pitchFamily="18" charset="0"/>
                 <a:cs typeface="Times New Roman" panose="02020603050405020304" pitchFamily="18" charset="0"/>
               </a:rPr>
@@ -6837,34 +7467,34 @@
           </a:p>
           <a:p>
             <a:r>
-              <a:rPr lang="en-US" b="1" cap="none" dirty="0">
+              <a:rPr lang="en-US" sz="1800" b="1" cap="none" dirty="0">
                 <a:latin typeface="Times New Roman" panose="02020603050405020304" pitchFamily="18" charset="0"/>
                 <a:cs typeface="Times New Roman" panose="02020603050405020304" pitchFamily="18" charset="0"/>
               </a:rPr>
               <a:t>Hands-on with react router:</a:t>
             </a:r>
             <a:br>
-              <a:rPr lang="en-US" cap="none" dirty="0">
+              <a:rPr lang="en-US" sz="1800" cap="none" dirty="0">
                 <a:latin typeface="Times New Roman" panose="02020603050405020304" pitchFamily="18" charset="0"/>
                 <a:cs typeface="Times New Roman" panose="02020603050405020304" pitchFamily="18" charset="0"/>
               </a:rPr>
             </a:br>
             <a:r>
-              <a:rPr lang="en-US" cap="none" dirty="0">
+              <a:rPr lang="en-US" sz="1800" cap="none" dirty="0">
                 <a:latin typeface="Times New Roman" panose="02020603050405020304" pitchFamily="18" charset="0"/>
                 <a:cs typeface="Times New Roman" panose="02020603050405020304" pitchFamily="18" charset="0"/>
               </a:rPr>
               <a:t>Implemented smooth navigation between pages using react-router-</a:t>
             </a:r>
             <a:r>
-              <a:rPr lang="en-US" cap="none" dirty="0" err="1">
+              <a:rPr lang="en-US" sz="1800" cap="none" dirty="0" err="1">
                 <a:latin typeface="Times New Roman" panose="02020603050405020304" pitchFamily="18" charset="0"/>
                 <a:cs typeface="Times New Roman" panose="02020603050405020304" pitchFamily="18" charset="0"/>
               </a:rPr>
               <a:t>dom</a:t>
             </a:r>
             <a:r>
-              <a:rPr lang="en-US" cap="none" dirty="0">
+              <a:rPr lang="en-US" sz="1800" cap="none" dirty="0">
                 <a:latin typeface="Times New Roman" panose="02020603050405020304" pitchFamily="18" charset="0"/>
                 <a:cs typeface="Times New Roman" panose="02020603050405020304" pitchFamily="18" charset="0"/>
               </a:rPr>
@@ -6873,34 +7503,34 @@
           </a:p>
           <a:p>
             <a:r>
-              <a:rPr lang="en-US" b="1" cap="none" dirty="0">
+              <a:rPr lang="en-US" sz="1800" b="1" cap="none" dirty="0">
                 <a:latin typeface="Times New Roman" panose="02020603050405020304" pitchFamily="18" charset="0"/>
                 <a:cs typeface="Times New Roman" panose="02020603050405020304" pitchFamily="18" charset="0"/>
               </a:rPr>
               <a:t>State management using </a:t>
             </a:r>
             <a:r>
-              <a:rPr lang="en-US" b="1" cap="none" dirty="0" err="1">
+              <a:rPr lang="en-US" sz="1800" b="1" cap="none" dirty="0" err="1">
                 <a:latin typeface="Times New Roman" panose="02020603050405020304" pitchFamily="18" charset="0"/>
                 <a:cs typeface="Times New Roman" panose="02020603050405020304" pitchFamily="18" charset="0"/>
               </a:rPr>
               <a:t>useState</a:t>
             </a:r>
             <a:r>
-              <a:rPr lang="en-US" b="1" cap="none" dirty="0">
+              <a:rPr lang="en-US" sz="1800" b="1" cap="none" dirty="0">
                 <a:latin typeface="Times New Roman" panose="02020603050405020304" pitchFamily="18" charset="0"/>
                 <a:cs typeface="Times New Roman" panose="02020603050405020304" pitchFamily="18" charset="0"/>
               </a:rPr>
               <a:t>:</a:t>
             </a:r>
             <a:br>
-              <a:rPr lang="en-US" cap="none" dirty="0">
+              <a:rPr lang="en-US" sz="1800" cap="none" dirty="0">
                 <a:latin typeface="Times New Roman" panose="02020603050405020304" pitchFamily="18" charset="0"/>
                 <a:cs typeface="Times New Roman" panose="02020603050405020304" pitchFamily="18" charset="0"/>
               </a:rPr>
             </a:br>
             <a:r>
-              <a:rPr lang="en-US" cap="none" dirty="0">
+              <a:rPr lang="en-US" sz="1800" cap="none" dirty="0">
                 <a:latin typeface="Times New Roman" panose="02020603050405020304" pitchFamily="18" charset="0"/>
                 <a:cs typeface="Times New Roman" panose="02020603050405020304" pitchFamily="18" charset="0"/>
               </a:rPr>
@@ -6909,48 +7539,34 @@
           </a:p>
           <a:p>
             <a:r>
-              <a:rPr lang="en-US" b="1" cap="none" dirty="0">
+              <a:rPr lang="en-US" sz="1800" b="1" cap="none" dirty="0">
                 <a:latin typeface="Times New Roman" panose="02020603050405020304" pitchFamily="18" charset="0"/>
                 <a:cs typeface="Times New Roman" panose="02020603050405020304" pitchFamily="18" charset="0"/>
               </a:rPr>
-              <a:t>Enhanced </a:t>
-            </a:r>
-            <a:r>
-              <a:rPr lang="en-US" b="1" cap="none" dirty="0" err="1">
-                <a:latin typeface="Times New Roman" panose="02020603050405020304" pitchFamily="18" charset="0"/>
-                <a:cs typeface="Times New Roman" panose="02020603050405020304" pitchFamily="18" charset="0"/>
-              </a:rPr>
-              <a:t>css</a:t>
-            </a:r>
-            <a:r>
-              <a:rPr lang="en-US" b="1" cap="none" dirty="0">
-                <a:latin typeface="Times New Roman" panose="02020603050405020304" pitchFamily="18" charset="0"/>
-                <a:cs typeface="Times New Roman" panose="02020603050405020304" pitchFamily="18" charset="0"/>
-              </a:rPr>
-              <a:t> styling &amp; responsiveness:</a:t>
+              <a:t>Enhanced CSS styling &amp; responsiveness:</a:t>
             </a:r>
             <a:br>
-              <a:rPr lang="en-US" cap="none" dirty="0">
+              <a:rPr lang="en-US" sz="1800" cap="none" dirty="0">
                 <a:latin typeface="Times New Roman" panose="02020603050405020304" pitchFamily="18" charset="0"/>
                 <a:cs typeface="Times New Roman" panose="02020603050405020304" pitchFamily="18" charset="0"/>
               </a:rPr>
             </a:br>
             <a:r>
-              <a:rPr lang="en-US" cap="none" dirty="0">
+              <a:rPr lang="en-US" sz="1800" cap="none" dirty="0">
                 <a:latin typeface="Times New Roman" panose="02020603050405020304" pitchFamily="18" charset="0"/>
                 <a:cs typeface="Times New Roman" panose="02020603050405020304" pitchFamily="18" charset="0"/>
               </a:rPr>
               <a:t>Designed clean, responsive layouts with gradients, hover effects, and better overall </a:t>
             </a:r>
             <a:r>
-              <a:rPr lang="en-US" cap="none" dirty="0" err="1">
+              <a:rPr lang="en-US" sz="1800" cap="none" dirty="0" err="1">
                 <a:latin typeface="Times New Roman" panose="02020603050405020304" pitchFamily="18" charset="0"/>
                 <a:cs typeface="Times New Roman" panose="02020603050405020304" pitchFamily="18" charset="0"/>
               </a:rPr>
               <a:t>ui</a:t>
             </a:r>
             <a:r>
-              <a:rPr lang="en-US" cap="none" dirty="0">
+              <a:rPr lang="en-US" sz="1800" cap="none" dirty="0">
                 <a:latin typeface="Times New Roman" panose="02020603050405020304" pitchFamily="18" charset="0"/>
                 <a:cs typeface="Times New Roman" panose="02020603050405020304" pitchFamily="18" charset="0"/>
               </a:rPr>
@@ -6959,31 +7575,93 @@
           </a:p>
           <a:p>
             <a:r>
-              <a:rPr lang="en-US" b="1" cap="none" dirty="0">
+              <a:rPr lang="en-US" sz="1800" b="1" cap="none" dirty="0">
                 <a:latin typeface="Times New Roman" panose="02020603050405020304" pitchFamily="18" charset="0"/>
                 <a:cs typeface="Times New Roman" panose="02020603050405020304" pitchFamily="18" charset="0"/>
               </a:rPr>
               <a:t>Code reusability &amp; component architecture:</a:t>
             </a:r>
             <a:br>
-              <a:rPr lang="en-US" cap="none" dirty="0">
+              <a:rPr lang="en-US" sz="1800" cap="none" dirty="0">
                 <a:latin typeface="Times New Roman" panose="02020603050405020304" pitchFamily="18" charset="0"/>
                 <a:cs typeface="Times New Roman" panose="02020603050405020304" pitchFamily="18" charset="0"/>
               </a:rPr>
             </a:br>
             <a:r>
-              <a:rPr lang="en-US" cap="none" dirty="0">
+              <a:rPr lang="en-US" sz="1800" cap="none" dirty="0">
                 <a:latin typeface="Times New Roman" panose="02020603050405020304" pitchFamily="18" charset="0"/>
                 <a:cs typeface="Times New Roman" panose="02020603050405020304" pitchFamily="18" charset="0"/>
               </a:rPr>
               <a:t>Reused and customized components to ensure design consistency and reduce code redundancy.</a:t>
             </a:r>
           </a:p>
-          <a:p>
-            <a:endParaRPr lang="en-IN" cap="none" dirty="0">
-              <a:latin typeface="Times New Roman" panose="02020603050405020304" pitchFamily="18" charset="0"/>
-              <a:cs typeface="Times New Roman" panose="02020603050405020304" pitchFamily="18" charset="0"/>
-            </a:endParaRPr>
+        </p:txBody>
+      </p:sp>
+      <p:sp>
+        <p:nvSpPr>
+          <p:cNvPr id="4" name="Footer Placeholder 3">
+            <a:extLst>
+              <a:ext uri="{FF2B5EF4-FFF2-40B4-BE49-F238E27FC236}">
+                <a16:creationId xmlns:a16="http://schemas.microsoft.com/office/drawing/2014/main" id="{098C3E3C-86DF-ACA9-3FB1-F12D499EBAAE}"/>
+              </a:ext>
+            </a:extLst>
+          </p:cNvPr>
+          <p:cNvSpPr>
+            <a:spLocks noGrp="1"/>
+          </p:cNvSpPr>
+          <p:nvPr>
+            <p:ph type="ftr" sz="quarter" idx="11"/>
+          </p:nvPr>
+        </p:nvSpPr>
+        <p:spPr>
+          <a:xfrm>
+            <a:off x="357593" y="6345188"/>
+            <a:ext cx="6672887" cy="365125"/>
+          </a:xfrm>
+        </p:spPr>
+        <p:txBody>
+          <a:bodyPr/>
+          <a:lstStyle/>
+          <a:p>
+            <a:r>
+              <a:rPr lang="en-IN" sz="2000" dirty="0"/>
+              <a:t>III CSE-C FSD Project</a:t>
+            </a:r>
+          </a:p>
+        </p:txBody>
+      </p:sp>
+      <p:sp>
+        <p:nvSpPr>
+          <p:cNvPr id="5" name="TextBox 4">
+            <a:extLst>
+              <a:ext uri="{FF2B5EF4-FFF2-40B4-BE49-F238E27FC236}">
+                <a16:creationId xmlns:a16="http://schemas.microsoft.com/office/drawing/2014/main" id="{2E507988-C6C1-FC53-8561-88C3299C3477}"/>
+              </a:ext>
+            </a:extLst>
+          </p:cNvPr>
+          <p:cNvSpPr txBox="1"/>
+          <p:nvPr/>
+        </p:nvSpPr>
+        <p:spPr>
+          <a:xfrm>
+            <a:off x="1637906" y="147757"/>
+            <a:ext cx="8411068" cy="461665"/>
+          </a:xfrm>
+          <a:prstGeom prst="rect">
+            <a:avLst/>
+          </a:prstGeom>
+          <a:noFill/>
+        </p:spPr>
+        <p:txBody>
+          <a:bodyPr wrap="square">
+            <a:spAutoFit/>
+          </a:bodyPr>
+          <a:lstStyle/>
+          <a:p>
+            <a:r>
+              <a:rPr lang="en-IN" sz="2400" dirty="0"/>
+              <a:t>G. Narayanamma Institute of Technology and Science (For Women)</a:t>
+            </a:r>
           </a:p>
         </p:txBody>
       </p:sp>
@@ -7054,6 +7732,74 @@
           </a:p>
         </p:txBody>
       </p:sp>
+      <p:sp>
+        <p:nvSpPr>
+          <p:cNvPr id="3" name="Footer Placeholder 2">
+            <a:extLst>
+              <a:ext uri="{FF2B5EF4-FFF2-40B4-BE49-F238E27FC236}">
+                <a16:creationId xmlns:a16="http://schemas.microsoft.com/office/drawing/2014/main" id="{CB02F1F6-5967-A01F-2E5C-9FB06987AFEF}"/>
+              </a:ext>
+            </a:extLst>
+          </p:cNvPr>
+          <p:cNvSpPr>
+            <a:spLocks noGrp="1"/>
+          </p:cNvSpPr>
+          <p:nvPr>
+            <p:ph type="ftr" sz="quarter" idx="11"/>
+          </p:nvPr>
+        </p:nvSpPr>
+        <p:spPr>
+          <a:xfrm>
+            <a:off x="480141" y="6147225"/>
+            <a:ext cx="6672887" cy="365125"/>
+          </a:xfrm>
+        </p:spPr>
+        <p:txBody>
+          <a:bodyPr/>
+          <a:lstStyle/>
+          <a:p>
+            <a:r>
+              <a:rPr lang="en-IN" sz="2000" dirty="0"/>
+              <a:t>III CSE-C FSD Project</a:t>
+            </a:r>
+          </a:p>
+        </p:txBody>
+      </p:sp>
+      <p:sp>
+        <p:nvSpPr>
+          <p:cNvPr id="4" name="TextBox 3">
+            <a:extLst>
+              <a:ext uri="{FF2B5EF4-FFF2-40B4-BE49-F238E27FC236}">
+                <a16:creationId xmlns:a16="http://schemas.microsoft.com/office/drawing/2014/main" id="{EEC6E747-3449-F0D8-C759-45120E311669}"/>
+              </a:ext>
+            </a:extLst>
+          </p:cNvPr>
+          <p:cNvSpPr txBox="1"/>
+          <p:nvPr/>
+        </p:nvSpPr>
+        <p:spPr>
+          <a:xfrm>
+            <a:off x="1637906" y="147757"/>
+            <a:ext cx="8411068" cy="461665"/>
+          </a:xfrm>
+          <a:prstGeom prst="rect">
+            <a:avLst/>
+          </a:prstGeom>
+          <a:noFill/>
+        </p:spPr>
+        <p:txBody>
+          <a:bodyPr wrap="square">
+            <a:spAutoFit/>
+          </a:bodyPr>
+          <a:lstStyle/>
+          <a:p>
+            <a:r>
+              <a:rPr lang="en-IN" sz="2400" dirty="0"/>
+              <a:t>G. Narayanamma Institute of Technology and Science (For Women)</a:t>
+            </a:r>
+          </a:p>
+        </p:txBody>
+      </p:sp>
     </p:spTree>
     <p:extLst>
       <p:ext uri="{BB962C8B-B14F-4D97-AF65-F5344CB8AC3E}">
@@ -7102,7 +7848,7 @@
         </p:nvSpPr>
         <p:spPr>
           <a:xfrm>
-            <a:off x="913774" y="381965"/>
+            <a:off x="800653" y="711903"/>
             <a:ext cx="10364451" cy="1030147"/>
           </a:xfrm>
         </p:spPr>
@@ -7280,6 +8026,74 @@
               <a:latin typeface="Times New Roman" panose="02020603050405020304" pitchFamily="18" charset="0"/>
               <a:cs typeface="Times New Roman" panose="02020603050405020304" pitchFamily="18" charset="0"/>
             </a:endParaRPr>
+          </a:p>
+        </p:txBody>
+      </p:sp>
+      <p:sp>
+        <p:nvSpPr>
+          <p:cNvPr id="4" name="Footer Placeholder 3">
+            <a:extLst>
+              <a:ext uri="{FF2B5EF4-FFF2-40B4-BE49-F238E27FC236}">
+                <a16:creationId xmlns:a16="http://schemas.microsoft.com/office/drawing/2014/main" id="{B7A4E165-11B1-4D9A-3A35-B1237817524C}"/>
+              </a:ext>
+            </a:extLst>
+          </p:cNvPr>
+          <p:cNvSpPr>
+            <a:spLocks noGrp="1"/>
+          </p:cNvSpPr>
+          <p:nvPr>
+            <p:ph type="ftr" sz="quarter" idx="11"/>
+          </p:nvPr>
+        </p:nvSpPr>
+        <p:spPr>
+          <a:xfrm>
+            <a:off x="376446" y="6114064"/>
+            <a:ext cx="6672887" cy="365125"/>
+          </a:xfrm>
+        </p:spPr>
+        <p:txBody>
+          <a:bodyPr/>
+          <a:lstStyle/>
+          <a:p>
+            <a:r>
+              <a:rPr lang="en-IN" sz="2000" dirty="0"/>
+              <a:t>III CSE-C FSD Project</a:t>
+            </a:r>
+          </a:p>
+        </p:txBody>
+      </p:sp>
+      <p:sp>
+        <p:nvSpPr>
+          <p:cNvPr id="6" name="TextBox 5">
+            <a:extLst>
+              <a:ext uri="{FF2B5EF4-FFF2-40B4-BE49-F238E27FC236}">
+                <a16:creationId xmlns:a16="http://schemas.microsoft.com/office/drawing/2014/main" id="{16CED31A-6B95-5106-B42D-6C1B915828C0}"/>
+              </a:ext>
+            </a:extLst>
+          </p:cNvPr>
+          <p:cNvSpPr txBox="1"/>
+          <p:nvPr/>
+        </p:nvSpPr>
+        <p:spPr>
+          <a:xfrm>
+            <a:off x="1557779" y="201308"/>
+            <a:ext cx="8510047" cy="461665"/>
+          </a:xfrm>
+          <a:prstGeom prst="rect">
+            <a:avLst/>
+          </a:prstGeom>
+          <a:noFill/>
+        </p:spPr>
+        <p:txBody>
+          <a:bodyPr wrap="square">
+            <a:spAutoFit/>
+          </a:bodyPr>
+          <a:lstStyle/>
+          <a:p>
+            <a:r>
+              <a:rPr lang="en-IN" sz="2400" dirty="0"/>
+              <a:t>G. Narayanamma Institute of Technology and Science (For Women)</a:t>
+            </a:r>
           </a:p>
         </p:txBody>
       </p:sp>
@@ -7331,8 +8145,8 @@
         </p:nvSpPr>
         <p:spPr>
           <a:xfrm>
-            <a:off x="798028" y="256572"/>
-            <a:ext cx="10364451" cy="810228"/>
+            <a:off x="819070" y="517716"/>
+            <a:ext cx="10023945" cy="722224"/>
           </a:xfrm>
         </p:spPr>
         <p:txBody>
@@ -7368,35 +8182,35 @@
             <p:ph idx="1"/>
             <p:extLst>
               <p:ext uri="{D42A27DB-BD31-4B8C-83A1-F6EECF244321}">
-                <p14:modId xmlns:p14="http://schemas.microsoft.com/office/powerpoint/2010/main" val="2030231997"/>
+                <p14:modId xmlns:p14="http://schemas.microsoft.com/office/powerpoint/2010/main" val="2702691274"/>
               </p:ext>
             </p:extLst>
           </p:nvPr>
         </p:nvGraphicFramePr>
         <p:xfrm>
-          <a:off x="1122743" y="1216025"/>
-          <a:ext cx="10039734" cy="5101246"/>
+          <a:off x="1348985" y="1057677"/>
+          <a:ext cx="9774644" cy="5137838"/>
         </p:xfrm>
         <a:graphic>
           <a:graphicData uri="http://schemas.openxmlformats.org/drawingml/2006/table">
             <a:tbl>
               <a:tblPr/>
               <a:tblGrid>
-                <a:gridCol w="2644567">
+                <a:gridCol w="2299188">
                   <a:extLst>
                     <a:ext uri="{9D8B030D-6E8A-4147-A177-3AD203B41FA5}">
                       <a16:colId xmlns:a16="http://schemas.microsoft.com/office/drawing/2014/main" val="3095148160"/>
                     </a:ext>
                   </a:extLst>
                 </a:gridCol>
-                <a:gridCol w="4048589">
+                <a:gridCol w="4217241">
                   <a:extLst>
                     <a:ext uri="{9D8B030D-6E8A-4147-A177-3AD203B41FA5}">
                       <a16:colId xmlns:a16="http://schemas.microsoft.com/office/drawing/2014/main" val="1188302072"/>
                     </a:ext>
                   </a:extLst>
                 </a:gridCol>
-                <a:gridCol w="3346578">
+                <a:gridCol w="3258215">
                   <a:extLst>
                     <a:ext uri="{9D8B030D-6E8A-4147-A177-3AD203B41FA5}">
                       <a16:colId xmlns:a16="http://schemas.microsoft.com/office/drawing/2014/main" val="1713786160"/>
@@ -7404,7 +8218,7 @@
                   </a:extLst>
                 </a:gridCol>
               </a:tblGrid>
-              <a:tr h="310564">
+              <a:tr h="280003">
                 <a:tc>
                   <a:txBody>
                     <a:bodyPr/>
@@ -7594,7 +8408,7 @@
                   </a:ext>
                 </a:extLst>
               </a:tr>
-              <a:tr h="1242255">
+              <a:tr h="917144">
                 <a:tc>
                   <a:txBody>
                     <a:bodyPr/>
@@ -7722,7 +8536,7 @@
                         <a:buNone/>
                       </a:pPr>
                       <a:r>
-                        <a:rPr lang="en-US" sz="1600">
+                        <a:rPr lang="en-US" sz="1600" dirty="0">
                           <a:latin typeface="Times New Roman" panose="02020603050405020304" pitchFamily="18" charset="0"/>
                           <a:cs typeface="Times New Roman" panose="02020603050405020304" pitchFamily="18" charset="0"/>
                         </a:rPr>
@@ -7776,7 +8590,7 @@
                   </a:ext>
                 </a:extLst>
               </a:tr>
-              <a:tr h="1475178">
+              <a:tr h="1129525">
                 <a:tc>
                   <a:txBody>
                     <a:bodyPr/>
@@ -7972,7 +8786,7 @@
                   </a:ext>
                 </a:extLst>
               </a:tr>
-              <a:tr h="1009333">
+              <a:tr h="1580833">
                 <a:tc>
                   <a:txBody>
                     <a:bodyPr/>
@@ -7982,13 +8796,150 @@
                         <a:buNone/>
                       </a:pPr>
                       <a:r>
-                        <a:rPr lang="en-IN" sz="1600" b="1">
+                        <a:rPr lang="en-IN" sz="1600" b="1" dirty="0" err="1">
                           <a:latin typeface="Times New Roman" panose="02020603050405020304" pitchFamily="18" charset="0"/>
                           <a:cs typeface="Times New Roman" panose="02020603050405020304" pitchFamily="18" charset="0"/>
                         </a:rPr>
-                        <a:t>Props (Properties)</a:t>
+                        <a:t>useEffect</a:t>
                       </a:r>
-                      <a:endParaRPr lang="en-IN" sz="1600">
+                      <a:r>
+                        <a:rPr lang="en-IN" sz="1600" b="1" dirty="0">
+                          <a:latin typeface="Times New Roman" panose="02020603050405020304" pitchFamily="18" charset="0"/>
+                          <a:cs typeface="Times New Roman" panose="02020603050405020304" pitchFamily="18" charset="0"/>
+                        </a:rPr>
+                        <a:t>  </a:t>
+                      </a:r>
+                    </a:p>
+                  </a:txBody>
+                  <a:tcPr marL="77641" marR="77641" marT="38820" marB="38820" anchor="ctr">
+                    <a:lnL w="12700" cap="flat" cmpd="sng" algn="ctr">
+                      <a:solidFill>
+                        <a:schemeClr val="tx1"/>
+                      </a:solidFill>
+                      <a:prstDash val="solid"/>
+                      <a:round/>
+                      <a:headEnd type="none" w="med" len="med"/>
+                      <a:tailEnd type="none" w="med" len="med"/>
+                    </a:lnL>
+                    <a:lnR w="12700" cap="flat" cmpd="sng" algn="ctr">
+                      <a:solidFill>
+                        <a:schemeClr val="tx1"/>
+                      </a:solidFill>
+                      <a:prstDash val="solid"/>
+                      <a:round/>
+                      <a:headEnd type="none" w="med" len="med"/>
+                      <a:tailEnd type="none" w="med" len="med"/>
+                    </a:lnR>
+                    <a:lnT w="12700" cap="flat" cmpd="sng" algn="ctr">
+                      <a:solidFill>
+                        <a:schemeClr val="tx1"/>
+                      </a:solidFill>
+                      <a:prstDash val="solid"/>
+                      <a:round/>
+                      <a:headEnd type="none" w="med" len="med"/>
+                      <a:tailEnd type="none" w="med" len="med"/>
+                    </a:lnT>
+                    <a:lnB w="12700" cap="flat" cmpd="sng" algn="ctr">
+                      <a:solidFill>
+                        <a:schemeClr val="tx1"/>
+                      </a:solidFill>
+                      <a:prstDash val="solid"/>
+                      <a:round/>
+                      <a:headEnd type="none" w="med" len="med"/>
+                      <a:tailEnd type="none" w="med" len="med"/>
+                    </a:lnB>
+                    <a:noFill/>
+                  </a:tcPr>
+                </a:tc>
+                <a:tc>
+                  <a:txBody>
+                    <a:bodyPr/>
+                    <a:lstStyle/>
+                    <a:p>
+                      <a:r>
+                        <a:rPr lang="en-US" sz="1800" b="0" kern="1200" dirty="0" err="1">
+                          <a:solidFill>
+                            <a:schemeClr val="tx1"/>
+                          </a:solidFill>
+                          <a:latin typeface="Times New Roman" panose="02020603050405020304" pitchFamily="18" charset="0"/>
+                          <a:ea typeface="+mn-ea"/>
+                          <a:cs typeface="Times New Roman" panose="02020603050405020304" pitchFamily="18" charset="0"/>
+                        </a:rPr>
+                        <a:t>useEffect</a:t>
+                      </a:r>
+                      <a:r>
+                        <a:rPr lang="en-US" sz="1600" b="0" dirty="0">
+                          <a:latin typeface="Times New Roman" panose="02020603050405020304" pitchFamily="18" charset="0"/>
+                          <a:cs typeface="Times New Roman" panose="02020603050405020304" pitchFamily="18" charset="0"/>
+                        </a:rPr>
+                        <a:t> is like a side-task manager in </a:t>
+                      </a:r>
+                      <a:r>
+                        <a:rPr lang="en-US" sz="1600" b="0" dirty="0" err="1">
+                          <a:latin typeface="Times New Roman" panose="02020603050405020304" pitchFamily="18" charset="0"/>
+                          <a:cs typeface="Times New Roman" panose="02020603050405020304" pitchFamily="18" charset="0"/>
+                        </a:rPr>
+                        <a:t>React.It</a:t>
+                      </a:r>
+                      <a:r>
+                        <a:rPr lang="en-US" sz="1600" b="0" dirty="0">
+                          <a:latin typeface="Times New Roman" panose="02020603050405020304" pitchFamily="18" charset="0"/>
+                          <a:cs typeface="Times New Roman" panose="02020603050405020304" pitchFamily="18" charset="0"/>
+                        </a:rPr>
+                        <a:t> runs code after your component renders, like:</a:t>
+                      </a:r>
+                    </a:p>
+                    <a:p>
+                      <a:r>
+                        <a:rPr lang="en-US" sz="1600" b="0" dirty="0">
+                          <a:latin typeface="Times New Roman" panose="02020603050405020304" pitchFamily="18" charset="0"/>
+                          <a:cs typeface="Times New Roman" panose="02020603050405020304" pitchFamily="18" charset="0"/>
+                        </a:rPr>
+                        <a:t>Fetching data from a </a:t>
+                      </a:r>
+                      <a:r>
+                        <a:rPr lang="en-US" sz="1600" b="0" dirty="0" err="1">
+                          <a:latin typeface="Times New Roman" panose="02020603050405020304" pitchFamily="18" charset="0"/>
+                          <a:cs typeface="Times New Roman" panose="02020603050405020304" pitchFamily="18" charset="0"/>
+                        </a:rPr>
+                        <a:t>server,Setting</a:t>
+                      </a:r>
+                      <a:r>
+                        <a:rPr lang="en-US" sz="1600" b="0" dirty="0">
+                          <a:latin typeface="Times New Roman" panose="02020603050405020304" pitchFamily="18" charset="0"/>
+                          <a:cs typeface="Times New Roman" panose="02020603050405020304" pitchFamily="18" charset="0"/>
+                        </a:rPr>
+                        <a:t> up timers</a:t>
+                      </a:r>
+                    </a:p>
+                    <a:p>
+                      <a:r>
+                        <a:rPr lang="en-US" sz="1600" b="0" dirty="0">
+                          <a:latin typeface="Times New Roman" panose="02020603050405020304" pitchFamily="18" charset="0"/>
+                          <a:cs typeface="Times New Roman" panose="02020603050405020304" pitchFamily="18" charset="0"/>
+                        </a:rPr>
+                        <a:t>Listening to </a:t>
+                      </a:r>
+                      <a:r>
+                        <a:rPr lang="en-US" sz="1600" b="0" dirty="0" err="1">
+                          <a:latin typeface="Times New Roman" panose="02020603050405020304" pitchFamily="18" charset="0"/>
+                          <a:cs typeface="Times New Roman" panose="02020603050405020304" pitchFamily="18" charset="0"/>
+                        </a:rPr>
+                        <a:t>events,Updating</a:t>
+                      </a:r>
+                      <a:r>
+                        <a:rPr lang="en-US" sz="1600" b="0" dirty="0">
+                          <a:latin typeface="Times New Roman" panose="02020603050405020304" pitchFamily="18" charset="0"/>
+                          <a:cs typeface="Times New Roman" panose="02020603050405020304" pitchFamily="18" charset="0"/>
+                        </a:rPr>
+                        <a:t> the page title</a:t>
+                      </a:r>
+                    </a:p>
+                    <a:p>
+                      <a:pPr>
+                        <a:buNone/>
+                      </a:pPr>
+                      <a:endParaRPr lang="en-US" sz="1600" dirty="0">
                         <a:latin typeface="Times New Roman" panose="02020603050405020304" pitchFamily="18" charset="0"/>
                         <a:cs typeface="Times New Roman" panose="02020603050405020304" pitchFamily="18" charset="0"/>
                       </a:endParaRPr>
@@ -8043,68 +8994,36 @@
                         <a:buNone/>
                       </a:pPr>
                       <a:r>
-                        <a:rPr lang="en-US" sz="1600">
+                        <a:rPr lang="en-US" sz="1800" kern="1200" dirty="0" err="1">
+                          <a:solidFill>
+                            <a:schemeClr val="tx1"/>
+                          </a:solidFill>
+                          <a:latin typeface="Times New Roman" panose="02020603050405020304" pitchFamily="18" charset="0"/>
+                          <a:ea typeface="+mn-ea"/>
+                          <a:cs typeface="Times New Roman" panose="02020603050405020304" pitchFamily="18" charset="0"/>
+                        </a:rPr>
+                        <a:t>useEffect</a:t>
+                      </a:r>
+                      <a:r>
+                        <a:rPr lang="en-US" sz="1600" dirty="0">
                           <a:latin typeface="Times New Roman" panose="02020603050405020304" pitchFamily="18" charset="0"/>
                           <a:cs typeface="Times New Roman" panose="02020603050405020304" pitchFamily="18" charset="0"/>
                         </a:rPr>
-                        <a:t>Allow passing data from parent to child components for reusability.</a:t>
+                        <a:t> runs </a:t>
                       </a:r>
-                    </a:p>
-                  </a:txBody>
-                  <a:tcPr marL="77641" marR="77641" marT="38820" marB="38820" anchor="ctr">
-                    <a:lnL w="12700" cap="flat" cmpd="sng" algn="ctr">
-                      <a:solidFill>
-                        <a:schemeClr val="tx1"/>
-                      </a:solidFill>
-                      <a:prstDash val="solid"/>
-                      <a:round/>
-                      <a:headEnd type="none" w="med" len="med"/>
-                      <a:tailEnd type="none" w="med" len="med"/>
-                    </a:lnL>
-                    <a:lnR w="12700" cap="flat" cmpd="sng" algn="ctr">
-                      <a:solidFill>
-                        <a:schemeClr val="tx1"/>
-                      </a:solidFill>
-                      <a:prstDash val="solid"/>
-                      <a:round/>
-                      <a:headEnd type="none" w="med" len="med"/>
-                      <a:tailEnd type="none" w="med" len="med"/>
-                    </a:lnR>
-                    <a:lnT w="12700" cap="flat" cmpd="sng" algn="ctr">
-                      <a:solidFill>
-                        <a:schemeClr val="tx1"/>
-                      </a:solidFill>
-                      <a:prstDash val="solid"/>
-                      <a:round/>
-                      <a:headEnd type="none" w="med" len="med"/>
-                      <a:tailEnd type="none" w="med" len="med"/>
-                    </a:lnT>
-                    <a:lnB w="12700" cap="flat" cmpd="sng" algn="ctr">
-                      <a:solidFill>
-                        <a:schemeClr val="tx1"/>
-                      </a:solidFill>
-                      <a:prstDash val="solid"/>
-                      <a:round/>
-                      <a:headEnd type="none" w="med" len="med"/>
-                      <a:tailEnd type="none" w="med" len="med"/>
-                    </a:lnB>
-                    <a:noFill/>
-                  </a:tcPr>
-                </a:tc>
-                <a:tc>
-                  <a:txBody>
-                    <a:bodyPr/>
-                    <a:lstStyle/>
-                    <a:p>
-                      <a:pPr>
-                        <a:buNone/>
-                      </a:pPr>
                       <a:r>
-                        <a:rPr lang="en-US" sz="1600">
+                        <a:rPr lang="en-US" sz="1600" b="1" dirty="0">
                           <a:latin typeface="Times New Roman" panose="02020603050405020304" pitchFamily="18" charset="0"/>
                           <a:cs typeface="Times New Roman" panose="02020603050405020304" pitchFamily="18" charset="0"/>
                         </a:rPr>
-                        <a:t>Used in Alumni.js to pass and display alumni details (like name, company, role) in cards using the imported data file.</a:t>
+                        <a:t>once</a:t>
+                      </a:r>
+                      <a:r>
+                        <a:rPr lang="en-US" sz="1600" dirty="0">
+                          <a:latin typeface="Times New Roman" panose="02020603050405020304" pitchFamily="18" charset="0"/>
+                          <a:cs typeface="Times New Roman" panose="02020603050405020304" pitchFamily="18" charset="0"/>
+                        </a:rPr>
+                        <a:t> when the component loads (used in Home, Alumni, Resources pages). </a:t>
                       </a:r>
                     </a:p>
                   </a:txBody>
@@ -8154,7 +9073,7 @@
                   </a:ext>
                 </a:extLst>
               </a:tr>
-              <a:tr h="1009333">
+              <a:tr h="917144">
                 <a:tc>
                   <a:txBody>
                     <a:bodyPr/>
@@ -8164,13 +9083,20 @@
                         <a:buNone/>
                       </a:pPr>
                       <a:r>
-                        <a:rPr lang="en-IN" sz="1600" b="1">
+                        <a:rPr lang="en-IN" sz="1600" b="1" dirty="0" err="1">
                           <a:latin typeface="Times New Roman" panose="02020603050405020304" pitchFamily="18" charset="0"/>
                           <a:cs typeface="Times New Roman" panose="02020603050405020304" pitchFamily="18" charset="0"/>
                         </a:rPr>
-                        <a:t>useState Hook</a:t>
+                        <a:t>useState</a:t>
                       </a:r>
-                      <a:endParaRPr lang="en-IN" sz="1600">
+                      <a:r>
+                        <a:rPr lang="en-IN" sz="1600" b="1" dirty="0">
+                          <a:latin typeface="Times New Roman" panose="02020603050405020304" pitchFamily="18" charset="0"/>
+                          <a:cs typeface="Times New Roman" panose="02020603050405020304" pitchFamily="18" charset="0"/>
+                        </a:rPr>
+                        <a:t> Hook</a:t>
+                      </a:r>
+                      <a:endParaRPr lang="en-IN" sz="1600" dirty="0">
                         <a:latin typeface="Times New Roman" panose="02020603050405020304" pitchFamily="18" charset="0"/>
                         <a:cs typeface="Times New Roman" panose="02020603050405020304" pitchFamily="18" charset="0"/>
                       </a:endParaRPr>
@@ -8225,7 +9151,7 @@
                         <a:buNone/>
                       </a:pPr>
                       <a:r>
-                        <a:rPr lang="en-US" sz="1600">
+                        <a:rPr lang="en-US" sz="1600" dirty="0">
                           <a:latin typeface="Times New Roman" panose="02020603050405020304" pitchFamily="18" charset="0"/>
                           <a:cs typeface="Times New Roman" panose="02020603050405020304" pitchFamily="18" charset="0"/>
                         </a:rPr>
@@ -8340,6 +9266,75 @@
           </a:graphicData>
         </a:graphic>
       </p:graphicFrame>
+      <p:sp>
+        <p:nvSpPr>
+          <p:cNvPr id="3" name="Footer Placeholder 2">
+            <a:extLst>
+              <a:ext uri="{FF2B5EF4-FFF2-40B4-BE49-F238E27FC236}">
+                <a16:creationId xmlns:a16="http://schemas.microsoft.com/office/drawing/2014/main" id="{713A3C96-EDA4-F05E-2618-A0A5D8F0F2F1}"/>
+              </a:ext>
+            </a:extLst>
+          </p:cNvPr>
+          <p:cNvSpPr>
+            <a:spLocks noGrp="1"/>
+          </p:cNvSpPr>
+          <p:nvPr>
+            <p:ph type="ftr" sz="quarter" idx="11"/>
+          </p:nvPr>
+        </p:nvSpPr>
+        <p:spPr>
+          <a:xfrm>
+            <a:off x="-1977718" y="6336124"/>
+            <a:ext cx="6653407" cy="365125"/>
+          </a:xfrm>
+        </p:spPr>
+        <p:txBody>
+          <a:bodyPr/>
+          <a:lstStyle/>
+          <a:p>
+            <a:pPr algn="ctr"/>
+            <a:r>
+              <a:rPr lang="en-IN" sz="2000" dirty="0"/>
+              <a:t>III CSE-C FSD Project</a:t>
+            </a:r>
+          </a:p>
+        </p:txBody>
+      </p:sp>
+      <p:sp>
+        <p:nvSpPr>
+          <p:cNvPr id="5" name="TextBox 4">
+            <a:extLst>
+              <a:ext uri="{FF2B5EF4-FFF2-40B4-BE49-F238E27FC236}">
+                <a16:creationId xmlns:a16="http://schemas.microsoft.com/office/drawing/2014/main" id="{5AC1AB3F-5EDB-3463-DA44-48A86C32F110}"/>
+              </a:ext>
+            </a:extLst>
+          </p:cNvPr>
+          <p:cNvSpPr txBox="1"/>
+          <p:nvPr/>
+        </p:nvSpPr>
+        <p:spPr>
+          <a:xfrm>
+            <a:off x="1647333" y="56051"/>
+            <a:ext cx="8411068" cy="461665"/>
+          </a:xfrm>
+          <a:prstGeom prst="rect">
+            <a:avLst/>
+          </a:prstGeom>
+          <a:noFill/>
+        </p:spPr>
+        <p:txBody>
+          <a:bodyPr wrap="square">
+            <a:spAutoFit/>
+          </a:bodyPr>
+          <a:lstStyle/>
+          <a:p>
+            <a:r>
+              <a:rPr lang="en-IN" sz="2400" dirty="0"/>
+              <a:t>G. Narayanamma Institute of Technology and Science (For Women)</a:t>
+            </a:r>
+          </a:p>
+        </p:txBody>
+      </p:sp>
     </p:spTree>
     <p:extLst>
       <p:ext uri="{BB962C8B-B14F-4D97-AF65-F5344CB8AC3E}">
@@ -8388,8 +9383,8 @@
         </p:nvSpPr>
         <p:spPr>
           <a:xfrm>
-            <a:off x="670706" y="363874"/>
-            <a:ext cx="10364451" cy="897767"/>
+            <a:off x="708414" y="568619"/>
+            <a:ext cx="10056997" cy="852184"/>
           </a:xfrm>
         </p:spPr>
         <p:txBody>
@@ -8425,14 +9420,14 @@
             <p:ph idx="1"/>
             <p:extLst>
               <p:ext uri="{D42A27DB-BD31-4B8C-83A1-F6EECF244321}">
-                <p14:modId xmlns:p14="http://schemas.microsoft.com/office/powerpoint/2010/main" val="4058228345"/>
+                <p14:modId xmlns:p14="http://schemas.microsoft.com/office/powerpoint/2010/main" val="1565943979"/>
               </p:ext>
             </p:extLst>
           </p:nvPr>
         </p:nvGraphicFramePr>
         <p:xfrm>
-          <a:off x="1226917" y="1713053"/>
-          <a:ext cx="9808240" cy="4571999"/>
+          <a:off x="1057234" y="1562206"/>
+          <a:ext cx="9808240" cy="4303310"/>
         </p:xfrm>
         <a:graphic>
           <a:graphicData uri="http://schemas.openxmlformats.org/drawingml/2006/table">
@@ -8484,17 +9479,41 @@
                     </a:p>
                   </a:txBody>
                   <a:tcPr marL="61147" marR="61147" marT="30574" marB="30574" anchor="ctr">
-                    <a:lnL>
-                      <a:noFill/>
+                    <a:lnL w="12700" cap="flat" cmpd="sng" algn="ctr">
+                      <a:solidFill>
+                        <a:schemeClr val="tx1"/>
+                      </a:solidFill>
+                      <a:prstDash val="solid"/>
+                      <a:round/>
+                      <a:headEnd type="none" w="med" len="med"/>
+                      <a:tailEnd type="none" w="med" len="med"/>
                     </a:lnL>
-                    <a:lnR>
-                      <a:noFill/>
+                    <a:lnR w="12700" cap="flat" cmpd="sng" algn="ctr">
+                      <a:solidFill>
+                        <a:schemeClr val="tx1"/>
+                      </a:solidFill>
+                      <a:prstDash val="solid"/>
+                      <a:round/>
+                      <a:headEnd type="none" w="med" len="med"/>
+                      <a:tailEnd type="none" w="med" len="med"/>
                     </a:lnR>
-                    <a:lnT>
-                      <a:noFill/>
+                    <a:lnT w="12700" cap="flat" cmpd="sng" algn="ctr">
+                      <a:solidFill>
+                        <a:schemeClr val="tx1"/>
+                      </a:solidFill>
+                      <a:prstDash val="solid"/>
+                      <a:round/>
+                      <a:headEnd type="none" w="med" len="med"/>
+                      <a:tailEnd type="none" w="med" len="med"/>
                     </a:lnT>
-                    <a:lnB>
-                      <a:noFill/>
+                    <a:lnB w="12700" cap="flat" cmpd="sng" algn="ctr">
+                      <a:solidFill>
+                        <a:schemeClr val="tx1"/>
+                      </a:solidFill>
+                      <a:prstDash val="solid"/>
+                      <a:round/>
+                      <a:headEnd type="none" w="med" len="med"/>
+                      <a:tailEnd type="none" w="med" len="med"/>
                     </a:lnB>
                     <a:noFill/>
                   </a:tcPr>
@@ -8521,17 +9540,41 @@
                     </a:p>
                   </a:txBody>
                   <a:tcPr marL="61147" marR="61147" marT="30574" marB="30574" anchor="ctr">
-                    <a:lnL>
-                      <a:noFill/>
+                    <a:lnL w="12700" cap="flat" cmpd="sng" algn="ctr">
+                      <a:solidFill>
+                        <a:schemeClr val="tx1"/>
+                      </a:solidFill>
+                      <a:prstDash val="solid"/>
+                      <a:round/>
+                      <a:headEnd type="none" w="med" len="med"/>
+                      <a:tailEnd type="none" w="med" len="med"/>
                     </a:lnL>
-                    <a:lnR>
-                      <a:noFill/>
+                    <a:lnR w="12700" cap="flat" cmpd="sng" algn="ctr">
+                      <a:solidFill>
+                        <a:schemeClr val="tx1"/>
+                      </a:solidFill>
+                      <a:prstDash val="solid"/>
+                      <a:round/>
+                      <a:headEnd type="none" w="med" len="med"/>
+                      <a:tailEnd type="none" w="med" len="med"/>
                     </a:lnR>
-                    <a:lnT>
-                      <a:noFill/>
+                    <a:lnT w="12700" cap="flat" cmpd="sng" algn="ctr">
+                      <a:solidFill>
+                        <a:schemeClr val="tx1"/>
+                      </a:solidFill>
+                      <a:prstDash val="solid"/>
+                      <a:round/>
+                      <a:headEnd type="none" w="med" len="med"/>
+                      <a:tailEnd type="none" w="med" len="med"/>
                     </a:lnT>
-                    <a:lnB>
-                      <a:noFill/>
+                    <a:lnB w="12700" cap="flat" cmpd="sng" algn="ctr">
+                      <a:solidFill>
+                        <a:schemeClr val="tx1"/>
+                      </a:solidFill>
+                      <a:prstDash val="solid"/>
+                      <a:round/>
+                      <a:headEnd type="none" w="med" len="med"/>
+                      <a:tailEnd type="none" w="med" len="med"/>
                     </a:lnB>
                     <a:noFill/>
                   </a:tcPr>
@@ -8558,17 +9601,41 @@
                     </a:p>
                   </a:txBody>
                   <a:tcPr marL="61147" marR="61147" marT="30574" marB="30574" anchor="ctr">
-                    <a:lnL>
-                      <a:noFill/>
+                    <a:lnL w="12700" cap="flat" cmpd="sng" algn="ctr">
+                      <a:solidFill>
+                        <a:schemeClr val="tx1"/>
+                      </a:solidFill>
+                      <a:prstDash val="solid"/>
+                      <a:round/>
+                      <a:headEnd type="none" w="med" len="med"/>
+                      <a:tailEnd type="none" w="med" len="med"/>
                     </a:lnL>
-                    <a:lnR>
-                      <a:noFill/>
+                    <a:lnR w="12700" cap="flat" cmpd="sng" algn="ctr">
+                      <a:solidFill>
+                        <a:schemeClr val="tx1"/>
+                      </a:solidFill>
+                      <a:prstDash val="solid"/>
+                      <a:round/>
+                      <a:headEnd type="none" w="med" len="med"/>
+                      <a:tailEnd type="none" w="med" len="med"/>
                     </a:lnR>
-                    <a:lnT>
-                      <a:noFill/>
+                    <a:lnT w="12700" cap="flat" cmpd="sng" algn="ctr">
+                      <a:solidFill>
+                        <a:schemeClr val="tx1"/>
+                      </a:solidFill>
+                      <a:prstDash val="solid"/>
+                      <a:round/>
+                      <a:headEnd type="none" w="med" len="med"/>
+                      <a:tailEnd type="none" w="med" len="med"/>
                     </a:lnT>
-                    <a:lnB>
-                      <a:noFill/>
+                    <a:lnB w="12700" cap="flat" cmpd="sng" algn="ctr">
+                      <a:solidFill>
+                        <a:schemeClr val="tx1"/>
+                      </a:solidFill>
+                      <a:prstDash val="solid"/>
+                      <a:round/>
+                      <a:headEnd type="none" w="med" len="med"/>
+                      <a:tailEnd type="none" w="med" len="med"/>
                     </a:lnB>
                     <a:noFill/>
                   </a:tcPr>
@@ -8579,7 +9646,7 @@
                   </a:ext>
                 </a:extLst>
               </a:tr>
-              <a:tr h="1061357">
+              <a:tr h="637588">
                 <a:tc>
                   <a:txBody>
                     <a:bodyPr/>
@@ -8602,17 +9669,41 @@
                     </a:p>
                   </a:txBody>
                   <a:tcPr marL="61147" marR="61147" marT="30574" marB="30574" anchor="ctr">
-                    <a:lnL>
-                      <a:noFill/>
+                    <a:lnL w="12700" cap="flat" cmpd="sng" algn="ctr">
+                      <a:solidFill>
+                        <a:schemeClr val="tx1"/>
+                      </a:solidFill>
+                      <a:prstDash val="solid"/>
+                      <a:round/>
+                      <a:headEnd type="none" w="med" len="med"/>
+                      <a:tailEnd type="none" w="med" len="med"/>
                     </a:lnL>
-                    <a:lnR>
-                      <a:noFill/>
+                    <a:lnR w="12700" cap="flat" cmpd="sng" algn="ctr">
+                      <a:solidFill>
+                        <a:schemeClr val="tx1"/>
+                      </a:solidFill>
+                      <a:prstDash val="solid"/>
+                      <a:round/>
+                      <a:headEnd type="none" w="med" len="med"/>
+                      <a:tailEnd type="none" w="med" len="med"/>
                     </a:lnR>
-                    <a:lnT>
-                      <a:noFill/>
+                    <a:lnT w="12700" cap="flat" cmpd="sng" algn="ctr">
+                      <a:solidFill>
+                        <a:schemeClr val="tx1"/>
+                      </a:solidFill>
+                      <a:prstDash val="solid"/>
+                      <a:round/>
+                      <a:headEnd type="none" w="med" len="med"/>
+                      <a:tailEnd type="none" w="med" len="med"/>
                     </a:lnT>
-                    <a:lnB>
-                      <a:noFill/>
+                    <a:lnB w="12700" cap="flat" cmpd="sng" algn="ctr">
+                      <a:solidFill>
+                        <a:schemeClr val="tx1"/>
+                      </a:solidFill>
+                      <a:prstDash val="solid"/>
+                      <a:round/>
+                      <a:headEnd type="none" w="med" len="med"/>
+                      <a:tailEnd type="none" w="med" len="med"/>
                     </a:lnB>
                     <a:noFill/>
                   </a:tcPr>
@@ -8635,17 +9726,41 @@
                     </a:p>
                   </a:txBody>
                   <a:tcPr marL="61147" marR="61147" marT="30574" marB="30574" anchor="ctr">
-                    <a:lnL>
-                      <a:noFill/>
+                    <a:lnL w="12700" cap="flat" cmpd="sng" algn="ctr">
+                      <a:solidFill>
+                        <a:schemeClr val="tx1"/>
+                      </a:solidFill>
+                      <a:prstDash val="solid"/>
+                      <a:round/>
+                      <a:headEnd type="none" w="med" len="med"/>
+                      <a:tailEnd type="none" w="med" len="med"/>
                     </a:lnL>
-                    <a:lnR>
-                      <a:noFill/>
+                    <a:lnR w="12700" cap="flat" cmpd="sng" algn="ctr">
+                      <a:solidFill>
+                        <a:schemeClr val="tx1"/>
+                      </a:solidFill>
+                      <a:prstDash val="solid"/>
+                      <a:round/>
+                      <a:headEnd type="none" w="med" len="med"/>
+                      <a:tailEnd type="none" w="med" len="med"/>
                     </a:lnR>
-                    <a:lnT>
-                      <a:noFill/>
+                    <a:lnT w="12700" cap="flat" cmpd="sng" algn="ctr">
+                      <a:solidFill>
+                        <a:schemeClr val="tx1"/>
+                      </a:solidFill>
+                      <a:prstDash val="solid"/>
+                      <a:round/>
+                      <a:headEnd type="none" w="med" len="med"/>
+                      <a:tailEnd type="none" w="med" len="med"/>
                     </a:lnT>
-                    <a:lnB>
-                      <a:noFill/>
+                    <a:lnB w="12700" cap="flat" cmpd="sng" algn="ctr">
+                      <a:solidFill>
+                        <a:schemeClr val="tx1"/>
+                      </a:solidFill>
+                      <a:prstDash val="solid"/>
+                      <a:round/>
+                      <a:headEnd type="none" w="med" len="med"/>
+                      <a:tailEnd type="none" w="med" len="med"/>
                     </a:lnB>
                     <a:noFill/>
                   </a:tcPr>
@@ -8668,17 +9783,41 @@
                     </a:p>
                   </a:txBody>
                   <a:tcPr marL="61147" marR="61147" marT="30574" marB="30574" anchor="ctr">
-                    <a:lnL>
-                      <a:noFill/>
+                    <a:lnL w="12700" cap="flat" cmpd="sng" algn="ctr">
+                      <a:solidFill>
+                        <a:schemeClr val="tx1"/>
+                      </a:solidFill>
+                      <a:prstDash val="solid"/>
+                      <a:round/>
+                      <a:headEnd type="none" w="med" len="med"/>
+                      <a:tailEnd type="none" w="med" len="med"/>
                     </a:lnL>
-                    <a:lnR>
-                      <a:noFill/>
+                    <a:lnR w="12700" cap="flat" cmpd="sng" algn="ctr">
+                      <a:solidFill>
+                        <a:schemeClr val="tx1"/>
+                      </a:solidFill>
+                      <a:prstDash val="solid"/>
+                      <a:round/>
+                      <a:headEnd type="none" w="med" len="med"/>
+                      <a:tailEnd type="none" w="med" len="med"/>
                     </a:lnR>
-                    <a:lnT>
-                      <a:noFill/>
+                    <a:lnT w="12700" cap="flat" cmpd="sng" algn="ctr">
+                      <a:solidFill>
+                        <a:schemeClr val="tx1"/>
+                      </a:solidFill>
+                      <a:prstDash val="solid"/>
+                      <a:round/>
+                      <a:headEnd type="none" w="med" len="med"/>
+                      <a:tailEnd type="none" w="med" len="med"/>
                     </a:lnT>
-                    <a:lnB>
-                      <a:noFill/>
+                    <a:lnB w="12700" cap="flat" cmpd="sng" algn="ctr">
+                      <a:solidFill>
+                        <a:schemeClr val="tx1"/>
+                      </a:solidFill>
+                      <a:prstDash val="solid"/>
+                      <a:round/>
+                      <a:headEnd type="none" w="med" len="med"/>
+                      <a:tailEnd type="none" w="med" len="med"/>
                     </a:lnB>
                     <a:noFill/>
                   </a:tcPr>
@@ -8712,17 +9851,41 @@
                     </a:p>
                   </a:txBody>
                   <a:tcPr marL="61147" marR="61147" marT="30574" marB="30574" anchor="ctr">
-                    <a:lnL>
-                      <a:noFill/>
+                    <a:lnL w="12700" cap="flat" cmpd="sng" algn="ctr">
+                      <a:solidFill>
+                        <a:schemeClr val="tx1"/>
+                      </a:solidFill>
+                      <a:prstDash val="solid"/>
+                      <a:round/>
+                      <a:headEnd type="none" w="med" len="med"/>
+                      <a:tailEnd type="none" w="med" len="med"/>
                     </a:lnL>
-                    <a:lnR>
-                      <a:noFill/>
+                    <a:lnR w="12700" cap="flat" cmpd="sng" algn="ctr">
+                      <a:solidFill>
+                        <a:schemeClr val="tx1"/>
+                      </a:solidFill>
+                      <a:prstDash val="solid"/>
+                      <a:round/>
+                      <a:headEnd type="none" w="med" len="med"/>
+                      <a:tailEnd type="none" w="med" len="med"/>
                     </a:lnR>
-                    <a:lnT>
-                      <a:noFill/>
+                    <a:lnT w="12700" cap="flat" cmpd="sng" algn="ctr">
+                      <a:solidFill>
+                        <a:schemeClr val="tx1"/>
+                      </a:solidFill>
+                      <a:prstDash val="solid"/>
+                      <a:round/>
+                      <a:headEnd type="none" w="med" len="med"/>
+                      <a:tailEnd type="none" w="med" len="med"/>
                     </a:lnT>
-                    <a:lnB>
-                      <a:noFill/>
+                    <a:lnB w="12700" cap="flat" cmpd="sng" algn="ctr">
+                      <a:solidFill>
+                        <a:schemeClr val="tx1"/>
+                      </a:solidFill>
+                      <a:prstDash val="solid"/>
+                      <a:round/>
+                      <a:headEnd type="none" w="med" len="med"/>
+                      <a:tailEnd type="none" w="med" len="med"/>
                     </a:lnB>
                     <a:noFill/>
                   </a:tcPr>
@@ -8745,17 +9908,41 @@
                     </a:p>
                   </a:txBody>
                   <a:tcPr marL="61147" marR="61147" marT="30574" marB="30574" anchor="ctr">
-                    <a:lnL>
-                      <a:noFill/>
+                    <a:lnL w="12700" cap="flat" cmpd="sng" algn="ctr">
+                      <a:solidFill>
+                        <a:schemeClr val="tx1"/>
+                      </a:solidFill>
+                      <a:prstDash val="solid"/>
+                      <a:round/>
+                      <a:headEnd type="none" w="med" len="med"/>
+                      <a:tailEnd type="none" w="med" len="med"/>
                     </a:lnL>
-                    <a:lnR>
-                      <a:noFill/>
+                    <a:lnR w="12700" cap="flat" cmpd="sng" algn="ctr">
+                      <a:solidFill>
+                        <a:schemeClr val="tx1"/>
+                      </a:solidFill>
+                      <a:prstDash val="solid"/>
+                      <a:round/>
+                      <a:headEnd type="none" w="med" len="med"/>
+                      <a:tailEnd type="none" w="med" len="med"/>
                     </a:lnR>
-                    <a:lnT>
-                      <a:noFill/>
+                    <a:lnT w="12700" cap="flat" cmpd="sng" algn="ctr">
+                      <a:solidFill>
+                        <a:schemeClr val="tx1"/>
+                      </a:solidFill>
+                      <a:prstDash val="solid"/>
+                      <a:round/>
+                      <a:headEnd type="none" w="med" len="med"/>
+                      <a:tailEnd type="none" w="med" len="med"/>
                     </a:lnT>
-                    <a:lnB>
-                      <a:noFill/>
+                    <a:lnB w="12700" cap="flat" cmpd="sng" algn="ctr">
+                      <a:solidFill>
+                        <a:schemeClr val="tx1"/>
+                      </a:solidFill>
+                      <a:prstDash val="solid"/>
+                      <a:round/>
+                      <a:headEnd type="none" w="med" len="med"/>
+                      <a:tailEnd type="none" w="med" len="med"/>
                     </a:lnB>
                     <a:noFill/>
                   </a:tcPr>
@@ -8792,17 +9979,41 @@
                     </a:p>
                   </a:txBody>
                   <a:tcPr marL="61147" marR="61147" marT="30574" marB="30574" anchor="ctr">
-                    <a:lnL>
-                      <a:noFill/>
+                    <a:lnL w="12700" cap="flat" cmpd="sng" algn="ctr">
+                      <a:solidFill>
+                        <a:schemeClr val="tx1"/>
+                      </a:solidFill>
+                      <a:prstDash val="solid"/>
+                      <a:round/>
+                      <a:headEnd type="none" w="med" len="med"/>
+                      <a:tailEnd type="none" w="med" len="med"/>
                     </a:lnL>
-                    <a:lnR>
-                      <a:noFill/>
+                    <a:lnR w="12700" cap="flat" cmpd="sng" algn="ctr">
+                      <a:solidFill>
+                        <a:schemeClr val="tx1"/>
+                      </a:solidFill>
+                      <a:prstDash val="solid"/>
+                      <a:round/>
+                      <a:headEnd type="none" w="med" len="med"/>
+                      <a:tailEnd type="none" w="med" len="med"/>
                     </a:lnR>
-                    <a:lnT>
-                      <a:noFill/>
+                    <a:lnT w="12700" cap="flat" cmpd="sng" algn="ctr">
+                      <a:solidFill>
+                        <a:schemeClr val="tx1"/>
+                      </a:solidFill>
+                      <a:prstDash val="solid"/>
+                      <a:round/>
+                      <a:headEnd type="none" w="med" len="med"/>
+                      <a:tailEnd type="none" w="med" len="med"/>
                     </a:lnT>
-                    <a:lnB>
-                      <a:noFill/>
+                    <a:lnB w="12700" cap="flat" cmpd="sng" algn="ctr">
+                      <a:solidFill>
+                        <a:schemeClr val="tx1"/>
+                      </a:solidFill>
+                      <a:prstDash val="solid"/>
+                      <a:round/>
+                      <a:headEnd type="none" w="med" len="med"/>
+                      <a:tailEnd type="none" w="med" len="med"/>
                     </a:lnB>
                     <a:noFill/>
                   </a:tcPr>
@@ -8823,30 +10034,54 @@
                         <a:buNone/>
                       </a:pPr>
                       <a:r>
-                        <a:rPr lang="en-IN" sz="1600" b="1">
+                        <a:rPr lang="en-IN" sz="1600" b="1" dirty="0">
                           <a:latin typeface="Times New Roman" panose="02020603050405020304" pitchFamily="18" charset="0"/>
                           <a:cs typeface="Times New Roman" panose="02020603050405020304" pitchFamily="18" charset="0"/>
                         </a:rPr>
                         <a:t>React Router</a:t>
                       </a:r>
-                      <a:endParaRPr lang="en-IN" sz="1600">
+                      <a:endParaRPr lang="en-IN" sz="1600" dirty="0">
                         <a:latin typeface="Times New Roman" panose="02020603050405020304" pitchFamily="18" charset="0"/>
                         <a:cs typeface="Times New Roman" panose="02020603050405020304" pitchFamily="18" charset="0"/>
                       </a:endParaRPr>
                     </a:p>
                   </a:txBody>
                   <a:tcPr marL="61147" marR="61147" marT="30574" marB="30574" anchor="ctr">
-                    <a:lnL>
-                      <a:noFill/>
+                    <a:lnL w="12700" cap="flat" cmpd="sng" algn="ctr">
+                      <a:solidFill>
+                        <a:schemeClr val="tx1"/>
+                      </a:solidFill>
+                      <a:prstDash val="solid"/>
+                      <a:round/>
+                      <a:headEnd type="none" w="med" len="med"/>
+                      <a:tailEnd type="none" w="med" len="med"/>
                     </a:lnL>
-                    <a:lnR>
-                      <a:noFill/>
+                    <a:lnR w="12700" cap="flat" cmpd="sng" algn="ctr">
+                      <a:solidFill>
+                        <a:schemeClr val="tx1"/>
+                      </a:solidFill>
+                      <a:prstDash val="solid"/>
+                      <a:round/>
+                      <a:headEnd type="none" w="med" len="med"/>
+                      <a:tailEnd type="none" w="med" len="med"/>
                     </a:lnR>
-                    <a:lnT>
-                      <a:noFill/>
+                    <a:lnT w="12700" cap="flat" cmpd="sng" algn="ctr">
+                      <a:solidFill>
+                        <a:schemeClr val="tx1"/>
+                      </a:solidFill>
+                      <a:prstDash val="solid"/>
+                      <a:round/>
+                      <a:headEnd type="none" w="med" len="med"/>
+                      <a:tailEnd type="none" w="med" len="med"/>
                     </a:lnT>
-                    <a:lnB>
-                      <a:noFill/>
+                    <a:lnB w="12700" cap="flat" cmpd="sng" algn="ctr">
+                      <a:solidFill>
+                        <a:schemeClr val="tx1"/>
+                      </a:solidFill>
+                      <a:prstDash val="solid"/>
+                      <a:round/>
+                      <a:headEnd type="none" w="med" len="med"/>
+                      <a:tailEnd type="none" w="med" len="med"/>
                     </a:lnB>
                     <a:noFill/>
                   </a:tcPr>
@@ -8869,17 +10104,41 @@
                     </a:p>
                   </a:txBody>
                   <a:tcPr marL="61147" marR="61147" marT="30574" marB="30574" anchor="ctr">
-                    <a:lnL>
-                      <a:noFill/>
+                    <a:lnL w="12700" cap="flat" cmpd="sng" algn="ctr">
+                      <a:solidFill>
+                        <a:schemeClr val="tx1"/>
+                      </a:solidFill>
+                      <a:prstDash val="solid"/>
+                      <a:round/>
+                      <a:headEnd type="none" w="med" len="med"/>
+                      <a:tailEnd type="none" w="med" len="med"/>
                     </a:lnL>
-                    <a:lnR>
-                      <a:noFill/>
+                    <a:lnR w="12700" cap="flat" cmpd="sng" algn="ctr">
+                      <a:solidFill>
+                        <a:schemeClr val="tx1"/>
+                      </a:solidFill>
+                      <a:prstDash val="solid"/>
+                      <a:round/>
+                      <a:headEnd type="none" w="med" len="med"/>
+                      <a:tailEnd type="none" w="med" len="med"/>
                     </a:lnR>
-                    <a:lnT>
-                      <a:noFill/>
+                    <a:lnT w="12700" cap="flat" cmpd="sng" algn="ctr">
+                      <a:solidFill>
+                        <a:schemeClr val="tx1"/>
+                      </a:solidFill>
+                      <a:prstDash val="solid"/>
+                      <a:round/>
+                      <a:headEnd type="none" w="med" len="med"/>
+                      <a:tailEnd type="none" w="med" len="med"/>
                     </a:lnT>
-                    <a:lnB>
-                      <a:noFill/>
+                    <a:lnB w="12700" cap="flat" cmpd="sng" algn="ctr">
+                      <a:solidFill>
+                        <a:schemeClr val="tx1"/>
+                      </a:solidFill>
+                      <a:prstDash val="solid"/>
+                      <a:round/>
+                      <a:headEnd type="none" w="med" len="med"/>
+                      <a:tailEnd type="none" w="med" len="med"/>
                     </a:lnB>
                     <a:noFill/>
                   </a:tcPr>
@@ -8944,17 +10203,41 @@
                     </a:p>
                   </a:txBody>
                   <a:tcPr marL="61147" marR="61147" marT="30574" marB="30574" anchor="ctr">
-                    <a:lnL>
-                      <a:noFill/>
+                    <a:lnL w="12700" cap="flat" cmpd="sng" algn="ctr">
+                      <a:solidFill>
+                        <a:schemeClr val="tx1"/>
+                      </a:solidFill>
+                      <a:prstDash val="solid"/>
+                      <a:round/>
+                      <a:headEnd type="none" w="med" len="med"/>
+                      <a:tailEnd type="none" w="med" len="med"/>
                     </a:lnL>
-                    <a:lnR>
-                      <a:noFill/>
+                    <a:lnR w="12700" cap="flat" cmpd="sng" algn="ctr">
+                      <a:solidFill>
+                        <a:schemeClr val="tx1"/>
+                      </a:solidFill>
+                      <a:prstDash val="solid"/>
+                      <a:round/>
+                      <a:headEnd type="none" w="med" len="med"/>
+                      <a:tailEnd type="none" w="med" len="med"/>
                     </a:lnR>
-                    <a:lnT>
-                      <a:noFill/>
+                    <a:lnT w="12700" cap="flat" cmpd="sng" algn="ctr">
+                      <a:solidFill>
+                        <a:schemeClr val="tx1"/>
+                      </a:solidFill>
+                      <a:prstDash val="solid"/>
+                      <a:round/>
+                      <a:headEnd type="none" w="med" len="med"/>
+                      <a:tailEnd type="none" w="med" len="med"/>
                     </a:lnT>
-                    <a:lnB>
-                      <a:noFill/>
+                    <a:lnB w="12700" cap="flat" cmpd="sng" algn="ctr">
+                      <a:solidFill>
+                        <a:schemeClr val="tx1"/>
+                      </a:solidFill>
+                      <a:prstDash val="solid"/>
+                      <a:round/>
+                      <a:headEnd type="none" w="med" len="med"/>
+                      <a:tailEnd type="none" w="med" len="med"/>
                     </a:lnB>
                     <a:noFill/>
                   </a:tcPr>
@@ -8975,30 +10258,54 @@
                         <a:buNone/>
                       </a:pPr>
                       <a:r>
-                        <a:rPr lang="en-IN" sz="1600" b="1">
+                        <a:rPr lang="en-IN" sz="1600" b="1" dirty="0">
                           <a:latin typeface="Times New Roman" panose="02020603050405020304" pitchFamily="18" charset="0"/>
                           <a:cs typeface="Times New Roman" panose="02020603050405020304" pitchFamily="18" charset="0"/>
                         </a:rPr>
                         <a:t>CSS Styling &amp; Modular Design</a:t>
                       </a:r>
-                      <a:endParaRPr lang="en-IN" sz="1600">
+                      <a:endParaRPr lang="en-IN" sz="1600" dirty="0">
                         <a:latin typeface="Times New Roman" panose="02020603050405020304" pitchFamily="18" charset="0"/>
                         <a:cs typeface="Times New Roman" panose="02020603050405020304" pitchFamily="18" charset="0"/>
                       </a:endParaRPr>
                     </a:p>
                   </a:txBody>
                   <a:tcPr marL="61147" marR="61147" marT="30574" marB="30574" anchor="ctr">
-                    <a:lnL>
-                      <a:noFill/>
+                    <a:lnL w="12700" cap="flat" cmpd="sng" algn="ctr">
+                      <a:solidFill>
+                        <a:schemeClr val="tx1"/>
+                      </a:solidFill>
+                      <a:prstDash val="solid"/>
+                      <a:round/>
+                      <a:headEnd type="none" w="med" len="med"/>
+                      <a:tailEnd type="none" w="med" len="med"/>
                     </a:lnL>
-                    <a:lnR>
-                      <a:noFill/>
+                    <a:lnR w="12700" cap="flat" cmpd="sng" algn="ctr">
+                      <a:solidFill>
+                        <a:schemeClr val="tx1"/>
+                      </a:solidFill>
+                      <a:prstDash val="solid"/>
+                      <a:round/>
+                      <a:headEnd type="none" w="med" len="med"/>
+                      <a:tailEnd type="none" w="med" len="med"/>
                     </a:lnR>
-                    <a:lnT>
-                      <a:noFill/>
+                    <a:lnT w="12700" cap="flat" cmpd="sng" algn="ctr">
+                      <a:solidFill>
+                        <a:schemeClr val="tx1"/>
+                      </a:solidFill>
+                      <a:prstDash val="solid"/>
+                      <a:round/>
+                      <a:headEnd type="none" w="med" len="med"/>
+                      <a:tailEnd type="none" w="med" len="med"/>
                     </a:lnT>
-                    <a:lnB>
-                      <a:noFill/>
+                    <a:lnB w="12700" cap="flat" cmpd="sng" algn="ctr">
+                      <a:solidFill>
+                        <a:schemeClr val="tx1"/>
+                      </a:solidFill>
+                      <a:prstDash val="solid"/>
+                      <a:round/>
+                      <a:headEnd type="none" w="med" len="med"/>
+                      <a:tailEnd type="none" w="med" len="med"/>
                     </a:lnB>
                     <a:noFill/>
                   </a:tcPr>
@@ -9021,17 +10328,41 @@
                     </a:p>
                   </a:txBody>
                   <a:tcPr marL="61147" marR="61147" marT="30574" marB="30574" anchor="ctr">
-                    <a:lnL>
-                      <a:noFill/>
+                    <a:lnL w="12700" cap="flat" cmpd="sng" algn="ctr">
+                      <a:solidFill>
+                        <a:schemeClr val="tx1"/>
+                      </a:solidFill>
+                      <a:prstDash val="solid"/>
+                      <a:round/>
+                      <a:headEnd type="none" w="med" len="med"/>
+                      <a:tailEnd type="none" w="med" len="med"/>
                     </a:lnL>
-                    <a:lnR>
-                      <a:noFill/>
+                    <a:lnR w="12700" cap="flat" cmpd="sng" algn="ctr">
+                      <a:solidFill>
+                        <a:schemeClr val="tx1"/>
+                      </a:solidFill>
+                      <a:prstDash val="solid"/>
+                      <a:round/>
+                      <a:headEnd type="none" w="med" len="med"/>
+                      <a:tailEnd type="none" w="med" len="med"/>
                     </a:lnR>
-                    <a:lnT>
-                      <a:noFill/>
+                    <a:lnT w="12700" cap="flat" cmpd="sng" algn="ctr">
+                      <a:solidFill>
+                        <a:schemeClr val="tx1"/>
+                      </a:solidFill>
+                      <a:prstDash val="solid"/>
+                      <a:round/>
+                      <a:headEnd type="none" w="med" len="med"/>
+                      <a:tailEnd type="none" w="med" len="med"/>
                     </a:lnT>
-                    <a:lnB>
-                      <a:noFill/>
+                    <a:lnB w="12700" cap="flat" cmpd="sng" algn="ctr">
+                      <a:solidFill>
+                        <a:schemeClr val="tx1"/>
+                      </a:solidFill>
+                      <a:prstDash val="solid"/>
+                      <a:round/>
+                      <a:headEnd type="none" w="med" len="med"/>
+                      <a:tailEnd type="none" w="med" len="med"/>
                     </a:lnB>
                     <a:noFill/>
                   </a:tcPr>
@@ -9054,17 +10385,41 @@
                     </a:p>
                   </a:txBody>
                   <a:tcPr marL="61147" marR="61147" marT="30574" marB="30574" anchor="ctr">
-                    <a:lnL>
-                      <a:noFill/>
+                    <a:lnL w="12700" cap="flat" cmpd="sng" algn="ctr">
+                      <a:solidFill>
+                        <a:schemeClr val="tx1"/>
+                      </a:solidFill>
+                      <a:prstDash val="solid"/>
+                      <a:round/>
+                      <a:headEnd type="none" w="med" len="med"/>
+                      <a:tailEnd type="none" w="med" len="med"/>
                     </a:lnL>
-                    <a:lnR>
-                      <a:noFill/>
+                    <a:lnR w="12700" cap="flat" cmpd="sng" algn="ctr">
+                      <a:solidFill>
+                        <a:schemeClr val="tx1"/>
+                      </a:solidFill>
+                      <a:prstDash val="solid"/>
+                      <a:round/>
+                      <a:headEnd type="none" w="med" len="med"/>
+                      <a:tailEnd type="none" w="med" len="med"/>
                     </a:lnR>
-                    <a:lnT>
-                      <a:noFill/>
+                    <a:lnT w="12700" cap="flat" cmpd="sng" algn="ctr">
+                      <a:solidFill>
+                        <a:schemeClr val="tx1"/>
+                      </a:solidFill>
+                      <a:prstDash val="solid"/>
+                      <a:round/>
+                      <a:headEnd type="none" w="med" len="med"/>
+                      <a:tailEnd type="none" w="med" len="med"/>
                     </a:lnT>
-                    <a:lnB>
-                      <a:noFill/>
+                    <a:lnB w="12700" cap="flat" cmpd="sng" algn="ctr">
+                      <a:solidFill>
+                        <a:schemeClr val="tx1"/>
+                      </a:solidFill>
+                      <a:prstDash val="solid"/>
+                      <a:round/>
+                      <a:headEnd type="none" w="med" len="med"/>
+                      <a:tailEnd type="none" w="med" len="med"/>
                     </a:lnB>
                     <a:noFill/>
                   </a:tcPr>
@@ -9079,6 +10434,75 @@
           </a:graphicData>
         </a:graphic>
       </p:graphicFrame>
+      <p:sp>
+        <p:nvSpPr>
+          <p:cNvPr id="3" name="Footer Placeholder 2">
+            <a:extLst>
+              <a:ext uri="{FF2B5EF4-FFF2-40B4-BE49-F238E27FC236}">
+                <a16:creationId xmlns:a16="http://schemas.microsoft.com/office/drawing/2014/main" id="{0CBE256F-3E84-B3DD-EC3C-D6843E9DA350}"/>
+              </a:ext>
+            </a:extLst>
+          </p:cNvPr>
+          <p:cNvSpPr>
+            <a:spLocks noGrp="1"/>
+          </p:cNvSpPr>
+          <p:nvPr>
+            <p:ph type="ftr" sz="quarter" idx="11"/>
+          </p:nvPr>
+        </p:nvSpPr>
+        <p:spPr>
+          <a:xfrm>
+            <a:off x="-1918810" y="6245575"/>
+            <a:ext cx="6672887" cy="365125"/>
+          </a:xfrm>
+        </p:spPr>
+        <p:txBody>
+          <a:bodyPr/>
+          <a:lstStyle/>
+          <a:p>
+            <a:pPr algn="ctr"/>
+            <a:r>
+              <a:rPr lang="en-IN" sz="2000" dirty="0"/>
+              <a:t>III CSE-C FSD Project</a:t>
+            </a:r>
+          </a:p>
+        </p:txBody>
+      </p:sp>
+      <p:sp>
+        <p:nvSpPr>
+          <p:cNvPr id="5" name="TextBox 4">
+            <a:extLst>
+              <a:ext uri="{FF2B5EF4-FFF2-40B4-BE49-F238E27FC236}">
+                <a16:creationId xmlns:a16="http://schemas.microsoft.com/office/drawing/2014/main" id="{6D2097CB-D378-7810-A7C7-ADAB1FEE14FF}"/>
+              </a:ext>
+            </a:extLst>
+          </p:cNvPr>
+          <p:cNvSpPr txBox="1"/>
+          <p:nvPr/>
+        </p:nvSpPr>
+        <p:spPr>
+          <a:xfrm>
+            <a:off x="1637906" y="147757"/>
+            <a:ext cx="8411068" cy="461665"/>
+          </a:xfrm>
+          <a:prstGeom prst="rect">
+            <a:avLst/>
+          </a:prstGeom>
+          <a:noFill/>
+        </p:spPr>
+        <p:txBody>
+          <a:bodyPr wrap="square">
+            <a:spAutoFit/>
+          </a:bodyPr>
+          <a:lstStyle/>
+          <a:p>
+            <a:r>
+              <a:rPr lang="en-IN" sz="2400" dirty="0"/>
+              <a:t>G. Narayanamma Institute of Technology and Science (For Women)</a:t>
+            </a:r>
+          </a:p>
+        </p:txBody>
+      </p:sp>
     </p:spTree>
     <p:extLst>
       <p:ext uri="{BB962C8B-B14F-4D97-AF65-F5344CB8AC3E}">
@@ -9127,7 +10551,7 @@
         </p:nvSpPr>
         <p:spPr>
           <a:xfrm>
-            <a:off x="763304" y="404386"/>
+            <a:off x="763303" y="517837"/>
             <a:ext cx="10364451" cy="712572"/>
           </a:xfrm>
         </p:spPr>
@@ -9172,8 +10596,8 @@
         </p:blipFill>
         <p:spPr>
           <a:xfrm>
-            <a:off x="1404595" y="1276108"/>
-            <a:ext cx="9370242" cy="4789025"/>
+            <a:off x="1390812" y="1230409"/>
+            <a:ext cx="9109434" cy="4655729"/>
           </a:xfrm>
           <a:prstGeom prst="rect">
             <a:avLst/>
@@ -9194,7 +10618,7 @@
         </p:nvSpPr>
         <p:spPr>
           <a:xfrm>
-            <a:off x="3646025" y="6065134"/>
+            <a:off x="3947682" y="5879068"/>
             <a:ext cx="5000264" cy="369332"/>
           </a:xfrm>
           <a:prstGeom prst="rect">
@@ -9214,6 +10638,75 @@
                 <a:cs typeface="Times New Roman" panose="02020603050405020304" pitchFamily="18" charset="0"/>
               </a:rPr>
               <a:t>Fig 1: User Interface (Navbar, Home Page) </a:t>
+            </a:r>
+          </a:p>
+        </p:txBody>
+      </p:sp>
+      <p:sp>
+        <p:nvSpPr>
+          <p:cNvPr id="3" name="Footer Placeholder 2">
+            <a:extLst>
+              <a:ext uri="{FF2B5EF4-FFF2-40B4-BE49-F238E27FC236}">
+                <a16:creationId xmlns:a16="http://schemas.microsoft.com/office/drawing/2014/main" id="{5811AE72-2BCD-E92B-72DE-92BA992307EA}"/>
+              </a:ext>
+            </a:extLst>
+          </p:cNvPr>
+          <p:cNvSpPr>
+            <a:spLocks noGrp="1"/>
+          </p:cNvSpPr>
+          <p:nvPr>
+            <p:ph type="ftr" sz="quarter" idx="11"/>
+          </p:nvPr>
+        </p:nvSpPr>
+        <p:spPr>
+          <a:xfrm>
+            <a:off x="-2008536" y="6323994"/>
+            <a:ext cx="6672887" cy="365125"/>
+          </a:xfrm>
+        </p:spPr>
+        <p:txBody>
+          <a:bodyPr/>
+          <a:lstStyle/>
+          <a:p>
+            <a:pPr algn="ctr"/>
+            <a:r>
+              <a:rPr lang="en-IN" sz="2000" dirty="0"/>
+              <a:t>III CSE-C FSD Project</a:t>
+            </a:r>
+          </a:p>
+        </p:txBody>
+      </p:sp>
+      <p:sp>
+        <p:nvSpPr>
+          <p:cNvPr id="4" name="TextBox 3">
+            <a:extLst>
+              <a:ext uri="{FF2B5EF4-FFF2-40B4-BE49-F238E27FC236}">
+                <a16:creationId xmlns:a16="http://schemas.microsoft.com/office/drawing/2014/main" id="{9CD213BF-09CB-1671-2D95-8410E5ACB465}"/>
+              </a:ext>
+            </a:extLst>
+          </p:cNvPr>
+          <p:cNvSpPr txBox="1"/>
+          <p:nvPr/>
+        </p:nvSpPr>
+        <p:spPr>
+          <a:xfrm>
+            <a:off x="1637906" y="147757"/>
+            <a:ext cx="8411068" cy="461665"/>
+          </a:xfrm>
+          <a:prstGeom prst="rect">
+            <a:avLst/>
+          </a:prstGeom>
+          <a:noFill/>
+        </p:spPr>
+        <p:txBody>
+          <a:bodyPr wrap="square">
+            <a:spAutoFit/>
+          </a:bodyPr>
+          <a:lstStyle/>
+          <a:p>
+            <a:r>
+              <a:rPr lang="en-IN" sz="2400" dirty="0"/>
+              <a:t>G. Narayanamma Institute of Technology and Science (For Women)</a:t>
             </a:r>
           </a:p>
         </p:txBody>
@@ -9266,7 +10759,7 @@
         </p:nvSpPr>
         <p:spPr>
           <a:xfrm>
-            <a:off x="913773" y="525919"/>
+            <a:off x="728376" y="665896"/>
             <a:ext cx="10364451" cy="782019"/>
           </a:xfrm>
         </p:spPr>
@@ -9311,7 +10804,7 @@
         </p:blipFill>
         <p:spPr>
           <a:xfrm>
-            <a:off x="1470581" y="1400537"/>
+            <a:off x="1470577" y="1297321"/>
             <a:ext cx="9049731" cy="4390664"/>
           </a:xfrm>
           <a:prstGeom prst="rect">
@@ -9333,7 +10826,7 @@
         </p:nvSpPr>
         <p:spPr>
           <a:xfrm>
-            <a:off x="3646025" y="6065134"/>
+            <a:off x="3702587" y="5743259"/>
             <a:ext cx="5000264" cy="369332"/>
           </a:xfrm>
           <a:prstGeom prst="rect">
@@ -9352,7 +10845,75 @@
                 <a:latin typeface="Times New Roman" panose="02020603050405020304" pitchFamily="18" charset="0"/>
                 <a:cs typeface="Times New Roman" panose="02020603050405020304" pitchFamily="18" charset="0"/>
               </a:rPr>
-              <a:t>Fig 1: User Interface (Home Page, Footer) </a:t>
+              <a:t>Fig 2: User Interface (Home Page, Footer) </a:t>
+            </a:r>
+          </a:p>
+        </p:txBody>
+      </p:sp>
+      <p:sp>
+        <p:nvSpPr>
+          <p:cNvPr id="3" name="Footer Placeholder 2">
+            <a:extLst>
+              <a:ext uri="{FF2B5EF4-FFF2-40B4-BE49-F238E27FC236}">
+                <a16:creationId xmlns:a16="http://schemas.microsoft.com/office/drawing/2014/main" id="{634D0B45-D7BD-89CA-55BC-F64306203374}"/>
+              </a:ext>
+            </a:extLst>
+          </p:cNvPr>
+          <p:cNvSpPr>
+            <a:spLocks noGrp="1"/>
+          </p:cNvSpPr>
+          <p:nvPr>
+            <p:ph type="ftr" sz="quarter" idx="11"/>
+          </p:nvPr>
+        </p:nvSpPr>
+        <p:spPr>
+          <a:xfrm>
+            <a:off x="159631" y="6218221"/>
+            <a:ext cx="6672887" cy="365125"/>
+          </a:xfrm>
+        </p:spPr>
+        <p:txBody>
+          <a:bodyPr/>
+          <a:lstStyle/>
+          <a:p>
+            <a:r>
+              <a:rPr lang="en-IN" sz="2000" dirty="0"/>
+              <a:t>III CSE-C FSD Project</a:t>
+            </a:r>
+          </a:p>
+        </p:txBody>
+      </p:sp>
+      <p:sp>
+        <p:nvSpPr>
+          <p:cNvPr id="4" name="TextBox 3">
+            <a:extLst>
+              <a:ext uri="{FF2B5EF4-FFF2-40B4-BE49-F238E27FC236}">
+                <a16:creationId xmlns:a16="http://schemas.microsoft.com/office/drawing/2014/main" id="{AC402775-E03E-D638-3F92-4897E2B4F577}"/>
+              </a:ext>
+            </a:extLst>
+          </p:cNvPr>
+          <p:cNvSpPr txBox="1"/>
+          <p:nvPr/>
+        </p:nvSpPr>
+        <p:spPr>
+          <a:xfrm>
+            <a:off x="1637906" y="147757"/>
+            <a:ext cx="8411068" cy="461665"/>
+          </a:xfrm>
+          <a:prstGeom prst="rect">
+            <a:avLst/>
+          </a:prstGeom>
+          <a:noFill/>
+        </p:spPr>
+        <p:txBody>
+          <a:bodyPr wrap="square">
+            <a:spAutoFit/>
+          </a:bodyPr>
+          <a:lstStyle/>
+          <a:p>
+            <a:r>
+              <a:rPr lang="en-IN" sz="2400" dirty="0"/>
+              <a:t>G. Narayanamma Institute of Technology and Science (For Women)</a:t>
             </a:r>
           </a:p>
         </p:txBody>
@@ -9405,7 +10966,7 @@
         </p:nvSpPr>
         <p:spPr>
           <a:xfrm>
-            <a:off x="913773" y="491196"/>
+            <a:off x="847785" y="651845"/>
             <a:ext cx="10364451" cy="793594"/>
           </a:xfrm>
         </p:spPr>
@@ -9450,7 +11011,7 @@
         </p:blipFill>
         <p:spPr>
           <a:xfrm>
-            <a:off x="1791093" y="1413004"/>
+            <a:off x="1561707" y="1293207"/>
             <a:ext cx="8766928" cy="4456253"/>
           </a:xfrm>
           <a:prstGeom prst="rect">
@@ -9472,7 +11033,7 @@
         </p:nvSpPr>
         <p:spPr>
           <a:xfrm>
-            <a:off x="4077183" y="5997472"/>
+            <a:off x="4234565" y="5749460"/>
             <a:ext cx="6094070" cy="369332"/>
           </a:xfrm>
           <a:prstGeom prst="rect">
@@ -9491,7 +11052,75 @@
                 <a:latin typeface="Times New Roman" panose="02020603050405020304" pitchFamily="18" charset="0"/>
                 <a:cs typeface="Times New Roman" panose="02020603050405020304" pitchFamily="18" charset="0"/>
               </a:rPr>
-              <a:t>Fig 1: User Interface (Alumni Page) </a:t>
+              <a:t>Fig 3: User Interface (Alumni Page) </a:t>
+            </a:r>
+          </a:p>
+        </p:txBody>
+      </p:sp>
+      <p:sp>
+        <p:nvSpPr>
+          <p:cNvPr id="3" name="Footer Placeholder 2">
+            <a:extLst>
+              <a:ext uri="{FF2B5EF4-FFF2-40B4-BE49-F238E27FC236}">
+                <a16:creationId xmlns:a16="http://schemas.microsoft.com/office/drawing/2014/main" id="{F12973C3-1B7E-E5A7-FFCD-147CDD09E686}"/>
+              </a:ext>
+            </a:extLst>
+          </p:cNvPr>
+          <p:cNvSpPr>
+            <a:spLocks noGrp="1"/>
+          </p:cNvSpPr>
+          <p:nvPr>
+            <p:ph type="ftr" sz="quarter" idx="11"/>
+          </p:nvPr>
+        </p:nvSpPr>
+        <p:spPr>
+          <a:xfrm>
+            <a:off x="272751" y="6238590"/>
+            <a:ext cx="6672887" cy="365125"/>
+          </a:xfrm>
+        </p:spPr>
+        <p:txBody>
+          <a:bodyPr/>
+          <a:lstStyle/>
+          <a:p>
+            <a:r>
+              <a:rPr lang="en-IN" sz="2000" dirty="0"/>
+              <a:t>III CSE-C FSD Project</a:t>
+            </a:r>
+          </a:p>
+        </p:txBody>
+      </p:sp>
+      <p:sp>
+        <p:nvSpPr>
+          <p:cNvPr id="4" name="TextBox 3">
+            <a:extLst>
+              <a:ext uri="{FF2B5EF4-FFF2-40B4-BE49-F238E27FC236}">
+                <a16:creationId xmlns:a16="http://schemas.microsoft.com/office/drawing/2014/main" id="{9F08BA86-AF9B-C222-6F14-8CB55DC4157D}"/>
+              </a:ext>
+            </a:extLst>
+          </p:cNvPr>
+          <p:cNvSpPr txBox="1"/>
+          <p:nvPr/>
+        </p:nvSpPr>
+        <p:spPr>
+          <a:xfrm>
+            <a:off x="1637906" y="147757"/>
+            <a:ext cx="8411068" cy="461665"/>
+          </a:xfrm>
+          <a:prstGeom prst="rect">
+            <a:avLst/>
+          </a:prstGeom>
+          <a:noFill/>
+        </p:spPr>
+        <p:txBody>
+          <a:bodyPr wrap="square">
+            <a:spAutoFit/>
+          </a:bodyPr>
+          <a:lstStyle/>
+          <a:p>
+            <a:r>
+              <a:rPr lang="en-IN" sz="2400" dirty="0"/>
+              <a:t>G. Narayanamma Institute of Technology and Science (For Women)</a:t>
             </a:r>
           </a:p>
         </p:txBody>
@@ -9544,7 +11173,7 @@
         </p:nvSpPr>
         <p:spPr>
           <a:xfrm>
-            <a:off x="913775" y="618518"/>
+            <a:off x="913774" y="618220"/>
             <a:ext cx="10364451" cy="663528"/>
           </a:xfrm>
         </p:spPr>
@@ -9591,8 +11220,8 @@
         </p:blipFill>
         <p:spPr>
           <a:xfrm>
-            <a:off x="1584960" y="1402080"/>
-            <a:ext cx="8757920" cy="4519569"/>
+            <a:off x="1687398" y="1281748"/>
+            <a:ext cx="8598922" cy="4437517"/>
           </a:xfrm>
           <a:prstGeom prst="rect">
             <a:avLst/>
@@ -9613,7 +11242,7 @@
         </p:nvSpPr>
         <p:spPr>
           <a:xfrm>
-            <a:off x="4033520" y="6054816"/>
+            <a:off x="3958106" y="5719265"/>
             <a:ext cx="6096000" cy="369332"/>
           </a:xfrm>
           <a:prstGeom prst="rect">
@@ -9632,7 +11261,75 @@
                 <a:latin typeface="Times New Roman" panose="02020603050405020304" pitchFamily="18" charset="0"/>
                 <a:cs typeface="Times New Roman" panose="02020603050405020304" pitchFamily="18" charset="0"/>
               </a:rPr>
-              <a:t>Fig 1: User Interface (Alumni Page – Dropdown) </a:t>
+              <a:t>Fig 4: User Interface (Alumni Page – Dropdown) </a:t>
+            </a:r>
+          </a:p>
+        </p:txBody>
+      </p:sp>
+      <p:sp>
+        <p:nvSpPr>
+          <p:cNvPr id="3" name="Footer Placeholder 2">
+            <a:extLst>
+              <a:ext uri="{FF2B5EF4-FFF2-40B4-BE49-F238E27FC236}">
+                <a16:creationId xmlns:a16="http://schemas.microsoft.com/office/drawing/2014/main" id="{8099E74A-3560-0B1B-96A1-2CDB0DA73164}"/>
+              </a:ext>
+            </a:extLst>
+          </p:cNvPr>
+          <p:cNvSpPr>
+            <a:spLocks noGrp="1"/>
+          </p:cNvSpPr>
+          <p:nvPr>
+            <p:ph type="ftr" sz="quarter" idx="11"/>
+          </p:nvPr>
+        </p:nvSpPr>
+        <p:spPr>
+          <a:xfrm>
+            <a:off x="191817" y="6222641"/>
+            <a:ext cx="6672887" cy="365125"/>
+          </a:xfrm>
+        </p:spPr>
+        <p:txBody>
+          <a:bodyPr/>
+          <a:lstStyle/>
+          <a:p>
+            <a:r>
+              <a:rPr lang="en-IN" sz="2000" dirty="0"/>
+              <a:t>III CSE-C FSD Project</a:t>
+            </a:r>
+          </a:p>
+        </p:txBody>
+      </p:sp>
+      <p:sp>
+        <p:nvSpPr>
+          <p:cNvPr id="4" name="TextBox 3">
+            <a:extLst>
+              <a:ext uri="{FF2B5EF4-FFF2-40B4-BE49-F238E27FC236}">
+                <a16:creationId xmlns:a16="http://schemas.microsoft.com/office/drawing/2014/main" id="{3656CBE9-D338-EFE9-1C0B-D3E24EE40885}"/>
+              </a:ext>
+            </a:extLst>
+          </p:cNvPr>
+          <p:cNvSpPr txBox="1"/>
+          <p:nvPr/>
+        </p:nvSpPr>
+        <p:spPr>
+          <a:xfrm>
+            <a:off x="1637906" y="147757"/>
+            <a:ext cx="8411068" cy="461665"/>
+          </a:xfrm>
+          <a:prstGeom prst="rect">
+            <a:avLst/>
+          </a:prstGeom>
+          <a:noFill/>
+        </p:spPr>
+        <p:txBody>
+          <a:bodyPr wrap="square">
+            <a:spAutoFit/>
+          </a:bodyPr>
+          <a:lstStyle/>
+          <a:p>
+            <a:r>
+              <a:rPr lang="en-IN" sz="2400" dirty="0"/>
+              <a:t>G. Narayanamma Institute of Technology and Science (For Women)</a:t>
             </a:r>
           </a:p>
         </p:txBody>
@@ -9685,7 +11382,7 @@
         </p:nvSpPr>
         <p:spPr>
           <a:xfrm>
-            <a:off x="838359" y="442218"/>
+            <a:off x="838358" y="811550"/>
             <a:ext cx="10364451" cy="559833"/>
           </a:xfrm>
         </p:spPr>
@@ -9728,7 +11425,7 @@
         </p:blipFill>
         <p:spPr>
           <a:xfrm>
-            <a:off x="1410878" y="1185592"/>
+            <a:off x="1410877" y="1371383"/>
             <a:ext cx="9219414" cy="4495398"/>
           </a:xfrm>
           <a:prstGeom prst="rect">
@@ -9750,7 +11447,7 @@
         </p:nvSpPr>
         <p:spPr>
           <a:xfrm>
-            <a:off x="4206712" y="6046450"/>
+            <a:off x="4206712" y="5966430"/>
             <a:ext cx="6094428" cy="369332"/>
           </a:xfrm>
           <a:prstGeom prst="rect">
@@ -9769,7 +11466,75 @@
                 <a:latin typeface="Times New Roman" panose="02020603050405020304" pitchFamily="18" charset="0"/>
                 <a:cs typeface="Times New Roman" panose="02020603050405020304" pitchFamily="18" charset="0"/>
               </a:rPr>
-              <a:t>Fig 1: User Interface (Alumni Page) </a:t>
+              <a:t>Fig 5: User Interface (Alumni Page) </a:t>
+            </a:r>
+          </a:p>
+        </p:txBody>
+      </p:sp>
+      <p:sp>
+        <p:nvSpPr>
+          <p:cNvPr id="3" name="Footer Placeholder 2">
+            <a:extLst>
+              <a:ext uri="{FF2B5EF4-FFF2-40B4-BE49-F238E27FC236}">
+                <a16:creationId xmlns:a16="http://schemas.microsoft.com/office/drawing/2014/main" id="{464F8920-1D28-6CBB-1F55-687492DF0299}"/>
+              </a:ext>
+            </a:extLst>
+          </p:cNvPr>
+          <p:cNvSpPr>
+            <a:spLocks noGrp="1"/>
+          </p:cNvSpPr>
+          <p:nvPr>
+            <p:ph type="ftr" sz="quarter" idx="11"/>
+          </p:nvPr>
+        </p:nvSpPr>
+        <p:spPr>
+          <a:xfrm>
+            <a:off x="244471" y="6335762"/>
+            <a:ext cx="6672887" cy="365125"/>
+          </a:xfrm>
+        </p:spPr>
+        <p:txBody>
+          <a:bodyPr/>
+          <a:lstStyle/>
+          <a:p>
+            <a:r>
+              <a:rPr lang="en-IN" sz="2000" dirty="0"/>
+              <a:t>III CSE-C FSD Project</a:t>
+            </a:r>
+          </a:p>
+        </p:txBody>
+      </p:sp>
+      <p:sp>
+        <p:nvSpPr>
+          <p:cNvPr id="4" name="TextBox 3">
+            <a:extLst>
+              <a:ext uri="{FF2B5EF4-FFF2-40B4-BE49-F238E27FC236}">
+                <a16:creationId xmlns:a16="http://schemas.microsoft.com/office/drawing/2014/main" id="{010D1E53-AF56-77C1-4E37-C6E45CBB5AE9}"/>
+              </a:ext>
+            </a:extLst>
+          </p:cNvPr>
+          <p:cNvSpPr txBox="1"/>
+          <p:nvPr/>
+        </p:nvSpPr>
+        <p:spPr>
+          <a:xfrm>
+            <a:off x="1722748" y="157113"/>
+            <a:ext cx="8411068" cy="461665"/>
+          </a:xfrm>
+          <a:prstGeom prst="rect">
+            <a:avLst/>
+          </a:prstGeom>
+          <a:noFill/>
+        </p:spPr>
+        <p:txBody>
+          <a:bodyPr wrap="square">
+            <a:spAutoFit/>
+          </a:bodyPr>
+          <a:lstStyle/>
+          <a:p>
+            <a:r>
+              <a:rPr lang="en-IN" sz="2400" dirty="0"/>
+              <a:t>G. Narayanamma Institute of Technology and Science (For Women)</a:t>
             </a:r>
           </a:p>
         </p:txBody>
@@ -10049,4 +11814,299 @@
     </a:ext>
   </a:extLst>
 </a:theme>
+</file>
+
+<file path=ppt/theme/theme2.xml><?xml version="1.0" encoding="utf-8"?>
+<a:theme xmlns:a="http://schemas.openxmlformats.org/drawingml/2006/main" name="Office Theme">
+  <a:themeElements>
+    <a:clrScheme name="Office">
+      <a:dk1>
+        <a:sysClr val="windowText" lastClr="000000"/>
+      </a:dk1>
+      <a:lt1>
+        <a:sysClr val="window" lastClr="FFFFFF"/>
+      </a:lt1>
+      <a:dk2>
+        <a:srgbClr val="44546A"/>
+      </a:dk2>
+      <a:lt2>
+        <a:srgbClr val="E7E6E6"/>
+      </a:lt2>
+      <a:accent1>
+        <a:srgbClr val="4472C4"/>
+      </a:accent1>
+      <a:accent2>
+        <a:srgbClr val="ED7D31"/>
+      </a:accent2>
+      <a:accent3>
+        <a:srgbClr val="A5A5A5"/>
+      </a:accent3>
+      <a:accent4>
+        <a:srgbClr val="FFC000"/>
+      </a:accent4>
+      <a:accent5>
+        <a:srgbClr val="5B9BD5"/>
+      </a:accent5>
+      <a:accent6>
+        <a:srgbClr val="70AD47"/>
+      </a:accent6>
+      <a:hlink>
+        <a:srgbClr val="0563C1"/>
+      </a:hlink>
+      <a:folHlink>
+        <a:srgbClr val="954F72"/>
+      </a:folHlink>
+    </a:clrScheme>
+    <a:fontScheme name="Office">
+      <a:majorFont>
+        <a:latin typeface="Calibri Light" panose="020F0302020204030204"/>
+        <a:ea typeface=""/>
+        <a:cs typeface=""/>
+        <a:font script="Jpan" typeface="游ゴシック Light"/>
+        <a:font script="Hang" typeface="맑은 고딕"/>
+        <a:font script="Hans" typeface="等线 Light"/>
+        <a:font script="Hant" typeface="新細明體"/>
+        <a:font script="Arab" typeface="Times New Roman"/>
+        <a:font script="Hebr" typeface="Times New Roman"/>
+        <a:font script="Thai" typeface="Angsana New"/>
+        <a:font script="Ethi" typeface="Nyala"/>
+        <a:font script="Beng" typeface="Vrinda"/>
+        <a:font script="Gujr" typeface="Shruti"/>
+        <a:font script="Khmr" typeface="MoolBoran"/>
+        <a:font script="Knda" typeface="Tunga"/>
+        <a:font script="Guru" typeface="Raavi"/>
+        <a:font script="Cans" typeface="Euphemia"/>
+        <a:font script="Cher" typeface="Plantagenet Cherokee"/>
+        <a:font script="Yiii" typeface="Microsoft Yi Baiti"/>
+        <a:font script="Tibt" typeface="Microsoft Himalaya"/>
+        <a:font script="Thaa" typeface="MV Boli"/>
+        <a:font script="Deva" typeface="Mangal"/>
+        <a:font script="Telu" typeface="Gautami"/>
+        <a:font script="Taml" typeface="Latha"/>
+        <a:font script="Syrc" typeface="Estrangelo Edessa"/>
+        <a:font script="Orya" typeface="Kalinga"/>
+        <a:font script="Mlym" typeface="Kartika"/>
+        <a:font script="Laoo" typeface="DokChampa"/>
+        <a:font script="Sinh" typeface="Iskoola Pota"/>
+        <a:font script="Mong" typeface="Mongolian Baiti"/>
+        <a:font script="Viet" typeface="Times New Roman"/>
+        <a:font script="Uigh" typeface="Microsoft Uighur"/>
+        <a:font script="Geor" typeface="Sylfaen"/>
+        <a:font script="Armn" typeface="Arial"/>
+        <a:font script="Bugi" typeface="Leelawadee UI"/>
+        <a:font script="Bopo" typeface="Microsoft JhengHei"/>
+        <a:font script="Java" typeface="Javanese Text"/>
+        <a:font script="Lisu" typeface="Segoe UI"/>
+        <a:font script="Mymr" typeface="Myanmar Text"/>
+        <a:font script="Nkoo" typeface="Ebrima"/>
+        <a:font script="Olck" typeface="Nirmala UI"/>
+        <a:font script="Osma" typeface="Ebrima"/>
+        <a:font script="Phag" typeface="Phagspa"/>
+        <a:font script="Syrn" typeface="Estrangelo Edessa"/>
+        <a:font script="Syrj" typeface="Estrangelo Edessa"/>
+        <a:font script="Syre" typeface="Estrangelo Edessa"/>
+        <a:font script="Sora" typeface="Nirmala UI"/>
+        <a:font script="Tale" typeface="Microsoft Tai Le"/>
+        <a:font script="Talu" typeface="Microsoft New Tai Lue"/>
+        <a:font script="Tfng" typeface="Ebrima"/>
+      </a:majorFont>
+      <a:minorFont>
+        <a:latin typeface="Calibri" panose="020F0502020204030204"/>
+        <a:ea typeface=""/>
+        <a:cs typeface=""/>
+        <a:font script="Jpan" typeface="游ゴシック"/>
+        <a:font script="Hang" typeface="맑은 고딕"/>
+        <a:font script="Hans" typeface="等线"/>
+        <a:font script="Hant" typeface="新細明體"/>
+        <a:font script="Arab" typeface="Arial"/>
+        <a:font script="Hebr" typeface="Arial"/>
+        <a:font script="Thai" typeface="Cordia New"/>
+        <a:font script="Ethi" typeface="Nyala"/>
+        <a:font script="Beng" typeface="Vrinda"/>
+        <a:font script="Gujr" typeface="Shruti"/>
+        <a:font script="Khmr" typeface="DaunPenh"/>
+        <a:font script="Knda" typeface="Tunga"/>
+        <a:font script="Guru" typeface="Raavi"/>
+        <a:font script="Cans" typeface="Euphemia"/>
+        <a:font script="Cher" typeface="Plantagenet Cherokee"/>
+        <a:font script="Yiii" typeface="Microsoft Yi Baiti"/>
+        <a:font script="Tibt" typeface="Microsoft Himalaya"/>
+        <a:font script="Thaa" typeface="MV Boli"/>
+        <a:font script="Deva" typeface="Mangal"/>
+        <a:font script="Telu" typeface="Gautami"/>
+        <a:font script="Taml" typeface="Latha"/>
+        <a:font script="Syrc" typeface="Estrangelo Edessa"/>
+        <a:font script="Orya" typeface="Kalinga"/>
+        <a:font script="Mlym" typeface="Kartika"/>
+        <a:font script="Laoo" typeface="DokChampa"/>
+        <a:font script="Sinh" typeface="Iskoola Pota"/>
+        <a:font script="Mong" typeface="Mongolian Baiti"/>
+        <a:font script="Viet" typeface="Arial"/>
+        <a:font script="Uigh" typeface="Microsoft Uighur"/>
+        <a:font script="Geor" typeface="Sylfaen"/>
+        <a:font script="Armn" typeface="Arial"/>
+        <a:font script="Bugi" typeface="Leelawadee UI"/>
+        <a:font script="Bopo" typeface="Microsoft JhengHei"/>
+        <a:font script="Java" typeface="Javanese Text"/>
+        <a:font script="Lisu" typeface="Segoe UI"/>
+        <a:font script="Mymr" typeface="Myanmar Text"/>
+        <a:font script="Nkoo" typeface="Ebrima"/>
+        <a:font script="Olck" typeface="Nirmala UI"/>
+        <a:font script="Osma" typeface="Ebrima"/>
+        <a:font script="Phag" typeface="Phagspa"/>
+        <a:font script="Syrn" typeface="Estrangelo Edessa"/>
+        <a:font script="Syrj" typeface="Estrangelo Edessa"/>
+        <a:font script="Syre" typeface="Estrangelo Edessa"/>
+        <a:font script="Sora" typeface="Nirmala UI"/>
+        <a:font script="Tale" typeface="Microsoft Tai Le"/>
+        <a:font script="Talu" typeface="Microsoft New Tai Lue"/>
+        <a:font script="Tfng" typeface="Ebrima"/>
+      </a:minorFont>
+    </a:fontScheme>
+    <a:fmtScheme name="Office">
+      <a:fillStyleLst>
+        <a:solidFill>
+          <a:schemeClr val="phClr"/>
+        </a:solidFill>
+        <a:gradFill rotWithShape="1">
+          <a:gsLst>
+            <a:gs pos="0">
+              <a:schemeClr val="phClr">
+                <a:lumMod val="110000"/>
+                <a:satMod val="105000"/>
+                <a:tint val="67000"/>
+              </a:schemeClr>
+            </a:gs>
+            <a:gs pos="50000">
+              <a:schemeClr val="phClr">
+                <a:lumMod val="105000"/>
+                <a:satMod val="103000"/>
+                <a:tint val="73000"/>
+              </a:schemeClr>
+            </a:gs>
+            <a:gs pos="100000">
+              <a:schemeClr val="phClr">
+                <a:lumMod val="105000"/>
+                <a:satMod val="109000"/>
+                <a:tint val="81000"/>
+              </a:schemeClr>
+            </a:gs>
+          </a:gsLst>
+          <a:lin ang="5400000" scaled="0"/>
+        </a:gradFill>
+        <a:gradFill rotWithShape="1">
+          <a:gsLst>
+            <a:gs pos="0">
+              <a:schemeClr val="phClr">
+                <a:satMod val="103000"/>
+                <a:lumMod val="102000"/>
+                <a:tint val="94000"/>
+              </a:schemeClr>
+            </a:gs>
+            <a:gs pos="50000">
+              <a:schemeClr val="phClr">
+                <a:satMod val="110000"/>
+                <a:lumMod val="100000"/>
+                <a:shade val="100000"/>
+              </a:schemeClr>
+            </a:gs>
+            <a:gs pos="100000">
+              <a:schemeClr val="phClr">
+                <a:lumMod val="99000"/>
+                <a:satMod val="120000"/>
+                <a:shade val="78000"/>
+              </a:schemeClr>
+            </a:gs>
+          </a:gsLst>
+          <a:lin ang="5400000" scaled="0"/>
+        </a:gradFill>
+      </a:fillStyleLst>
+      <a:lnStyleLst>
+        <a:ln w="6350" cap="flat" cmpd="sng" algn="ctr">
+          <a:solidFill>
+            <a:schemeClr val="phClr"/>
+          </a:solidFill>
+          <a:prstDash val="solid"/>
+          <a:miter lim="800000"/>
+        </a:ln>
+        <a:ln w="12700" cap="flat" cmpd="sng" algn="ctr">
+          <a:solidFill>
+            <a:schemeClr val="phClr"/>
+          </a:solidFill>
+          <a:prstDash val="solid"/>
+          <a:miter lim="800000"/>
+        </a:ln>
+        <a:ln w="19050" cap="flat" cmpd="sng" algn="ctr">
+          <a:solidFill>
+            <a:schemeClr val="phClr"/>
+          </a:solidFill>
+          <a:prstDash val="solid"/>
+          <a:miter lim="800000"/>
+        </a:ln>
+      </a:lnStyleLst>
+      <a:effectStyleLst>
+        <a:effectStyle>
+          <a:effectLst/>
+        </a:effectStyle>
+        <a:effectStyle>
+          <a:effectLst/>
+        </a:effectStyle>
+        <a:effectStyle>
+          <a:effectLst>
+            <a:outerShdw blurRad="57150" dist="19050" dir="5400000" algn="ctr" rotWithShape="0">
+              <a:srgbClr val="000000">
+                <a:alpha val="63000"/>
+              </a:srgbClr>
+            </a:outerShdw>
+          </a:effectLst>
+        </a:effectStyle>
+      </a:effectStyleLst>
+      <a:bgFillStyleLst>
+        <a:solidFill>
+          <a:schemeClr val="phClr"/>
+        </a:solidFill>
+        <a:solidFill>
+          <a:schemeClr val="phClr">
+            <a:tint val="95000"/>
+            <a:satMod val="170000"/>
+          </a:schemeClr>
+        </a:solidFill>
+        <a:gradFill rotWithShape="1">
+          <a:gsLst>
+            <a:gs pos="0">
+              <a:schemeClr val="phClr">
+                <a:tint val="93000"/>
+                <a:satMod val="150000"/>
+                <a:shade val="98000"/>
+                <a:lumMod val="102000"/>
+              </a:schemeClr>
+            </a:gs>
+            <a:gs pos="50000">
+              <a:schemeClr val="phClr">
+                <a:tint val="98000"/>
+                <a:satMod val="130000"/>
+                <a:shade val="90000"/>
+                <a:lumMod val="103000"/>
+              </a:schemeClr>
+            </a:gs>
+            <a:gs pos="100000">
+              <a:schemeClr val="phClr">
+                <a:shade val="63000"/>
+                <a:satMod val="120000"/>
+              </a:schemeClr>
+            </a:gs>
+          </a:gsLst>
+          <a:lin ang="5400000" scaled="0"/>
+        </a:gradFill>
+      </a:bgFillStyleLst>
+    </a:fmtScheme>
+  </a:themeElements>
+  <a:objectDefaults/>
+  <a:extraClrSchemeLst/>
+  <a:extLst>
+    <a:ext uri="{05A4C25C-085E-4340-85A3-A5531E510DB2}">
+      <thm15:themeFamily xmlns:thm15="http://schemas.microsoft.com/office/thememl/2012/main" name="Office Theme" id="{62F939B6-93AF-4DB8-9C6B-D6C7DFDC589F}" vid="{4A3C46E8-61CC-4603-A589-7422A47A8E4A}"/>
+    </a:ext>
+  </a:extLst>
+</a:theme>
 </file>